--- a/jekyll-www.mock-server.com/images/MockServerScenarios.pptx
+++ b/jekyll-www.mock-server.com/images/MockServerScenarios.pptx
@@ -19,6 +19,10 @@
     <p:sldId id="259" r:id="rId10"/>
     <p:sldId id="269" r:id="rId11"/>
     <p:sldId id="272" r:id="rId12"/>
+    <p:sldId id="273" r:id="rId18"/>
+    <p:sldId id="274" r:id="rId19"/>
+    <p:sldId id="275" r:id="rId20"/>
+    <p:sldId id="276" r:id="rId21"/>
   </p:sldIdLst>
   <p:sldSz cx="21283613" cy="7099300"/>
   <p:notesSz cx="6858000" cy="9144000"/>
@@ -11838,6 +11842,2271 @@
 </p:sld>
 </file>
 
+<file path=ppt/slides/slide12.xml><?xml version="1.0" encoding="utf-8"?>
+<p:sld xmlns:a="http://schemas.openxmlformats.org/drawingml/2006/main" xmlns:p="http://schemas.openxmlformats.org/presentationml/2006/main" xmlns:r="http://schemas.openxmlformats.org/officeDocument/2006/relationships">
+  <p:cSld>
+    <p:spTree>
+      <p:nvGrpSpPr>
+        <p:cNvPr id="1" name=""/>
+        <p:cNvGrpSpPr/>
+        <p:nvPr/>
+      </p:nvGrpSpPr>
+      <p:grpSpPr/>
+      <p:cxnSp>
+        <p:nvCxnSpPr>
+          <p:cNvPr id="17" name="Straight Arrow Connector 16"/>
+          <p:cNvCxnSpPr/>
+          <p:nvPr/>
+        </p:nvCxnSpPr>
+        <p:spPr>
+          <a:xfrm flipV="1">
+            <a:off x="6606318" y="3568479"/>
+            <a:ext cx="1260401" cy="1888"/>
+          </a:xfrm>
+          <a:prstGeom prst="straightConnector1">
+            <a:avLst/>
+          </a:prstGeom>
+          <a:ln>
+            <a:tailEnd type="arrow"/>
+          </a:ln>
+        </p:spPr>
+        <p:style>
+          <a:lnRef idx="2">
+            <a:schemeClr val="accent1"/>
+          </a:lnRef>
+          <a:fillRef idx="0">
+            <a:schemeClr val="accent1"/>
+          </a:fillRef>
+          <a:effectRef idx="1">
+            <a:schemeClr val="accent1"/>
+          </a:effectRef>
+          <a:fontRef idx="minor">
+            <a:schemeClr val="tx1"/>
+          </a:fontRef>
+        </p:style>
+      </p:cxnSp>
+      <p:sp>
+        <p:nvSpPr>
+          <p:cNvPr id="18" name="TextBox 17"/>
+          <p:cNvSpPr txBox="1"/>
+          <p:nvPr/>
+        </p:nvSpPr>
+        <p:spPr>
+          <a:xfrm>
+            <a:off x="6511199" y="3291482"/>
+            <a:ext cx="1553402" cy="276999"/>
+          </a:xfrm>
+          <a:prstGeom prst="rect">
+            <a:avLst/>
+          </a:prstGeom>
+          <a:noFill/>
+        </p:spPr>
+        <p:txBody>
+          <a:bodyPr wrap="square" rtlCol="0">
+            <a:spAutoFit/>
+          </a:bodyPr>
+          <a:lstStyle/>
+          <a:p>
+            <a:r>
+              <a:rPr lang="en-US" sz="1200" dirty="0"/>
+              <a:t>1. Receive Request</a:t>
+            </a:r>
+          </a:p>
+        </p:txBody>
+      </p:sp>
+      <p:sp>
+        <p:nvSpPr>
+          <p:cNvPr id="67" name="TextBox 66"/>
+          <p:cNvSpPr txBox="1"/>
+          <p:nvPr/>
+        </p:nvSpPr>
+        <p:spPr>
+          <a:xfrm>
+            <a:off x="6519098" y="4323714"/>
+            <a:ext cx="1921769" cy="276999"/>
+          </a:xfrm>
+          <a:prstGeom prst="rect">
+            <a:avLst/>
+          </a:prstGeom>
+          <a:noFill/>
+        </p:spPr>
+        <p:txBody>
+          <a:bodyPr wrap="square" rtlCol="0">
+            <a:spAutoFit/>
+          </a:bodyPr>
+          <a:lstStyle/>
+          <a:p>
+            <a:r>
+              <a:rPr lang="en-US" sz="1200" dirty="0"/>
+              <a:t>3. Inject Fault</a:t>
+            </a:r>
+          </a:p>
+        </p:txBody>
+      </p:sp>
+      <p:grpSp>
+        <p:nvGrpSpPr>
+          <p:cNvPr id="2" name="Group 1"/>
+          <p:cNvGrpSpPr/>
+          <p:nvPr/>
+        </p:nvGrpSpPr>
+        <p:grpSpPr>
+          <a:xfrm>
+            <a:off x="7973480" y="2948459"/>
+            <a:ext cx="3997396" cy="2867691"/>
+            <a:chOff x="1903674" y="2827807"/>
+            <a:chExt cx="3866269" cy="2867691"/>
+          </a:xfrm>
+        </p:grpSpPr>
+        <p:sp>
+          <p:nvSpPr>
+            <p:cNvPr id="22" name="Rounded Rectangle 21"/>
+            <p:cNvSpPr/>
+            <p:nvPr/>
+          </p:nvSpPr>
+          <p:spPr>
+            <a:xfrm>
+              <a:off x="2208474" y="3132607"/>
+              <a:ext cx="3561469" cy="2562891"/>
+            </a:xfrm>
+            <a:prstGeom prst="roundRect">
+              <a:avLst/>
+            </a:prstGeom>
+            <a:solidFill>
+              <a:schemeClr val="bg1"/>
+            </a:solidFill>
+            <a:ln w="19050" cmpd="sng">
+              <a:solidFill>
+                <a:schemeClr val="tx1"/>
+              </a:solidFill>
+              <a:prstDash val="dash"/>
+            </a:ln>
+          </p:spPr>
+          <p:style>
+            <a:lnRef idx="1">
+              <a:schemeClr val="accent1"/>
+            </a:lnRef>
+            <a:fillRef idx="3">
+              <a:schemeClr val="accent1"/>
+            </a:fillRef>
+            <a:effectRef idx="2">
+              <a:schemeClr val="accent1"/>
+            </a:effectRef>
+            <a:fontRef idx="minor">
+              <a:schemeClr val="lt1"/>
+            </a:fontRef>
+          </p:style>
+          <p:txBody>
+            <a:bodyPr rtlCol="0" anchor="b" anchorCtr="0"/>
+            <a:lstStyle/>
+            <a:p>
+              <a:pPr algn="ctr"/>
+              <a:r>
+                <a:rPr lang="en-US" sz="1400" dirty="0">
+                  <a:solidFill>
+                    <a:schemeClr val="tx1"/>
+                  </a:solidFill>
+                  <a:latin typeface="Helvetica"/>
+                  <a:cs typeface="Helvetica"/>
+                </a:rPr>
+                <a:t>Expectation</a:t>
+              </a:r>
+            </a:p>
+          </p:txBody>
+        </p:sp>
+        <p:sp>
+          <p:nvSpPr>
+            <p:cNvPr id="21" name="Rounded Rectangle 20"/>
+            <p:cNvSpPr/>
+            <p:nvPr/>
+          </p:nvSpPr>
+          <p:spPr>
+            <a:xfrm>
+              <a:off x="2056074" y="2980207"/>
+              <a:ext cx="3561469" cy="2562891"/>
+            </a:xfrm>
+            <a:prstGeom prst="roundRect">
+              <a:avLst/>
+            </a:prstGeom>
+            <a:solidFill>
+              <a:schemeClr val="bg1"/>
+            </a:solidFill>
+            <a:ln w="19050" cmpd="sng">
+              <a:solidFill>
+                <a:schemeClr val="tx1"/>
+              </a:solidFill>
+              <a:prstDash val="dash"/>
+            </a:ln>
+          </p:spPr>
+          <p:style>
+            <a:lnRef idx="1">
+              <a:schemeClr val="accent1"/>
+            </a:lnRef>
+            <a:fillRef idx="3">
+              <a:schemeClr val="accent1"/>
+            </a:fillRef>
+            <a:effectRef idx="2">
+              <a:schemeClr val="accent1"/>
+            </a:effectRef>
+            <a:fontRef idx="minor">
+              <a:schemeClr val="lt1"/>
+            </a:fontRef>
+          </p:style>
+          <p:txBody>
+            <a:bodyPr rtlCol="0" anchor="b" anchorCtr="0"/>
+            <a:lstStyle/>
+            <a:p>
+              <a:pPr algn="ctr"/>
+              <a:r>
+                <a:rPr lang="en-US" sz="1400" dirty="0">
+                  <a:solidFill>
+                    <a:schemeClr val="tx1"/>
+                  </a:solidFill>
+                  <a:latin typeface="Helvetica"/>
+                  <a:cs typeface="Helvetica"/>
+                </a:rPr>
+                <a:t>Expectation</a:t>
+              </a:r>
+            </a:p>
+          </p:txBody>
+        </p:sp>
+        <p:sp>
+          <p:nvSpPr>
+            <p:cNvPr id="73" name="Rounded Rectangle 72"/>
+            <p:cNvSpPr/>
+            <p:nvPr/>
+          </p:nvSpPr>
+          <p:spPr>
+            <a:xfrm>
+              <a:off x="1903674" y="2827807"/>
+              <a:ext cx="3561469" cy="2562891"/>
+            </a:xfrm>
+            <a:prstGeom prst="roundRect">
+              <a:avLst/>
+            </a:prstGeom>
+            <a:solidFill>
+              <a:schemeClr val="bg1"/>
+            </a:solidFill>
+            <a:ln w="19050" cmpd="sng">
+              <a:solidFill>
+                <a:schemeClr val="tx1"/>
+              </a:solidFill>
+              <a:prstDash val="dash"/>
+            </a:ln>
+          </p:spPr>
+          <p:style>
+            <a:lnRef idx="1">
+              <a:schemeClr val="accent1"/>
+            </a:lnRef>
+            <a:fillRef idx="3">
+              <a:schemeClr val="accent1"/>
+            </a:fillRef>
+            <a:effectRef idx="2">
+              <a:schemeClr val="accent1"/>
+            </a:effectRef>
+            <a:fontRef idx="minor">
+              <a:schemeClr val="lt1"/>
+            </a:fontRef>
+          </p:style>
+          <p:txBody>
+            <a:bodyPr rtlCol="0" anchor="b" anchorCtr="0"/>
+            <a:lstStyle/>
+            <a:p>
+              <a:pPr algn="ctr"/>
+              <a:r>
+                <a:rPr lang="en-US" sz="1400" dirty="0">
+                  <a:solidFill>
+                    <a:schemeClr val="tx1"/>
+                  </a:solidFill>
+                  <a:latin typeface="Helvetica"/>
+                  <a:cs typeface="Helvetica"/>
+                </a:rPr>
+                <a:t>Expectation</a:t>
+              </a:r>
+            </a:p>
+          </p:txBody>
+        </p:sp>
+      </p:grpSp>
+      <p:sp>
+        <p:nvSpPr>
+          <p:cNvPr id="75" name="Rectangle 74"/>
+          <p:cNvSpPr/>
+          <p:nvPr/>
+        </p:nvSpPr>
+        <p:spPr>
+          <a:xfrm>
+            <a:off x="9469602" y="3238315"/>
+            <a:ext cx="940561" cy="664100"/>
+          </a:xfrm>
+          <a:prstGeom prst="rect">
+            <a:avLst/>
+          </a:prstGeom>
+          <a:solidFill>
+            <a:schemeClr val="bg1"/>
+          </a:solidFill>
+          <a:ln w="19050" cmpd="sng">
+            <a:solidFill>
+              <a:schemeClr val="tx1"/>
+            </a:solidFill>
+          </a:ln>
+        </p:spPr>
+        <p:style>
+          <a:lnRef idx="1">
+            <a:schemeClr val="accent1"/>
+          </a:lnRef>
+          <a:fillRef idx="3">
+            <a:schemeClr val="accent1"/>
+          </a:fillRef>
+          <a:effectRef idx="2">
+            <a:schemeClr val="accent1"/>
+          </a:effectRef>
+          <a:fontRef idx="minor">
+            <a:schemeClr val="lt1"/>
+          </a:fontRef>
+        </p:style>
+        <p:txBody>
+          <a:bodyPr lIns="91436" tIns="45718" rIns="91436" bIns="45718" rtlCol="0" anchor="ctr" anchorCtr="0"/>
+          <a:lstStyle/>
+          <a:p>
+            <a:pPr algn="ctr"/>
+            <a:r>
+              <a:rPr lang="en-US" sz="900" dirty="0">
+                <a:solidFill>
+                  <a:schemeClr val="tx1"/>
+                </a:solidFill>
+                <a:latin typeface="Helvetica"/>
+                <a:cs typeface="Helvetica"/>
+              </a:rPr>
+              <a:t>Request</a:t>
+            </a:r>
+          </a:p>
+          <a:p>
+            <a:pPr algn="ctr"/>
+            <a:r>
+              <a:rPr lang="en-US" sz="900" dirty="0">
+                <a:solidFill>
+                  <a:schemeClr val="tx1"/>
+                </a:solidFill>
+                <a:latin typeface="Helvetica"/>
+                <a:cs typeface="Helvetica"/>
+              </a:rPr>
+              <a:t>Matcher</a:t>
+            </a:r>
+          </a:p>
+        </p:txBody>
+      </p:sp>
+      <p:cxnSp>
+        <p:nvCxnSpPr>
+          <p:cNvPr id="88" name="Straight Arrow Connector 87"/>
+          <p:cNvCxnSpPr/>
+          <p:nvPr/>
+        </p:nvCxnSpPr>
+        <p:spPr>
+          <a:xfrm flipH="1" flipV="1">
+            <a:off x="6606316" y="4594953"/>
+            <a:ext cx="3567666" cy="2512"/>
+          </a:xfrm>
+          <a:prstGeom prst="straightConnector1">
+            <a:avLst/>
+          </a:prstGeom>
+          <a:ln>
+            <a:solidFill>
+              <a:srgbClr val="C00000"/>
+            </a:solidFill>
+            <a:tailEnd type="triangle"/>
+          </a:ln>
+        </p:spPr>
+        <p:style>
+          <a:lnRef idx="2">
+            <a:schemeClr val="accent1"/>
+          </a:lnRef>
+          <a:fillRef idx="0">
+            <a:schemeClr val="accent1"/>
+          </a:fillRef>
+          <a:effectRef idx="1">
+            <a:schemeClr val="accent1"/>
+          </a:effectRef>
+          <a:fontRef idx="minor">
+            <a:schemeClr val="tx1"/>
+          </a:fontRef>
+        </p:style>
+      </p:cxnSp>
+      <p:sp>
+        <p:nvSpPr>
+          <p:cNvPr id="92" name="TextBox 91"/>
+          <p:cNvSpPr txBox="1"/>
+          <p:nvPr/>
+        </p:nvSpPr>
+        <p:spPr>
+          <a:xfrm>
+            <a:off x="8083349" y="3293474"/>
+            <a:ext cx="1553402" cy="276999"/>
+          </a:xfrm>
+          <a:prstGeom prst="rect">
+            <a:avLst/>
+          </a:prstGeom>
+          <a:noFill/>
+          <a:effectLst>
+            <a:softEdge rad="12700"/>
+          </a:effectLst>
+        </p:spPr>
+        <p:txBody>
+          <a:bodyPr wrap="square" rtlCol="0">
+            <a:spAutoFit/>
+          </a:bodyPr>
+          <a:lstStyle/>
+          <a:p>
+            <a:r>
+              <a:rPr lang="en-US" sz="1200" dirty="0"/>
+              <a:t>2. Match Request</a:t>
+            </a:r>
+          </a:p>
+        </p:txBody>
+      </p:sp>
+      <p:cxnSp>
+        <p:nvCxnSpPr>
+          <p:cNvPr id="101" name="Straight Arrow Connector 100"/>
+          <p:cNvCxnSpPr/>
+          <p:nvPr/>
+        </p:nvCxnSpPr>
+        <p:spPr>
+          <a:xfrm>
+            <a:off x="8178829" y="3570365"/>
+            <a:ext cx="1176446" cy="0"/>
+          </a:xfrm>
+          <a:prstGeom prst="straightConnector1">
+            <a:avLst/>
+          </a:prstGeom>
+          <a:ln>
+            <a:tailEnd type="triangle"/>
+          </a:ln>
+        </p:spPr>
+        <p:style>
+          <a:lnRef idx="2">
+            <a:schemeClr val="accent1"/>
+          </a:lnRef>
+          <a:fillRef idx="0">
+            <a:schemeClr val="accent1"/>
+          </a:fillRef>
+          <a:effectRef idx="1">
+            <a:schemeClr val="accent1"/>
+          </a:effectRef>
+          <a:fontRef idx="minor">
+            <a:schemeClr val="tx1"/>
+          </a:fontRef>
+        </p:style>
+      </p:cxnSp>
+      <p:sp>
+        <p:nvSpPr>
+          <p:cNvPr id="19" name="Rectangle 18"/>
+          <p:cNvSpPr/>
+          <p:nvPr/>
+        </p:nvSpPr>
+        <p:spPr>
+          <a:xfrm>
+            <a:off x="10305924" y="4278588"/>
+            <a:ext cx="940561" cy="664100"/>
+          </a:xfrm>
+          <a:prstGeom prst="rect">
+            <a:avLst/>
+          </a:prstGeom>
+          <a:solidFill>
+            <a:schemeClr val="bg1"/>
+          </a:solidFill>
+          <a:ln w="19050" cmpd="sng">
+            <a:solidFill>
+              <a:schemeClr val="tx1"/>
+            </a:solidFill>
+          </a:ln>
+        </p:spPr>
+        <p:style>
+          <a:lnRef idx="1">
+            <a:schemeClr val="accent1"/>
+          </a:lnRef>
+          <a:fillRef idx="3">
+            <a:schemeClr val="accent1"/>
+          </a:fillRef>
+          <a:effectRef idx="2">
+            <a:schemeClr val="accent1"/>
+          </a:effectRef>
+          <a:fontRef idx="minor">
+            <a:schemeClr val="lt1"/>
+          </a:fontRef>
+        </p:style>
+        <p:txBody>
+          <a:bodyPr lIns="91436" tIns="45718" rIns="91436" bIns="45718" rtlCol="0" anchor="ctr" anchorCtr="0"/>
+          <a:lstStyle/>
+          <a:p>
+            <a:pPr algn="ctr"/>
+            <a:r>
+              <a:rPr lang="en-US" sz="900" dirty="0">
+                <a:solidFill>
+                  <a:schemeClr val="tx1"/>
+                </a:solidFill>
+                <a:latin typeface="Helvetica"/>
+                <a:cs typeface="Helvetica"/>
+              </a:rPr>
+              <a:t>Chaos</a:t>
+            </a:r>
+          </a:p>
+          <a:p>
+            <a:pPr algn="ctr"/>
+            <a:r>
+              <a:rPr lang="en-US" sz="900" dirty="0">
+                <a:solidFill>
+                  <a:schemeClr val="tx1"/>
+                </a:solidFill>
+                <a:latin typeface="Helvetica"/>
+                <a:cs typeface="Helvetica"/>
+              </a:rPr>
+              <a:t>Action</a:t>
+            </a:r>
+          </a:p>
+        </p:txBody>
+      </p:sp>
+      <p:cxnSp>
+        <p:nvCxnSpPr>
+          <p:cNvPr id="20" name="Elbow Connector 19"/>
+          <p:cNvCxnSpPr/>
+          <p:nvPr/>
+        </p:nvCxnSpPr>
+        <p:spPr>
+          <a:xfrm>
+            <a:off x="10410161" y="3570367"/>
+            <a:ext cx="366042" cy="708223"/>
+          </a:xfrm>
+          <a:prstGeom prst="bentConnector2">
+            <a:avLst/>
+          </a:prstGeom>
+          <a:ln>
+            <a:tailEnd type="triangle"/>
+          </a:ln>
+        </p:spPr>
+        <p:style>
+          <a:lnRef idx="2">
+            <a:schemeClr val="accent1"/>
+          </a:lnRef>
+          <a:fillRef idx="0">
+            <a:schemeClr val="accent1"/>
+          </a:fillRef>
+          <a:effectRef idx="1">
+            <a:schemeClr val="accent1"/>
+          </a:effectRef>
+          <a:fontRef idx="minor">
+            <a:schemeClr val="tx1"/>
+          </a:fontRef>
+        </p:style>
+      </p:cxnSp>
+    </p:spTree>
+  </p:cSld>
+  <p:clrMapOvr>
+    <a:masterClrMapping/>
+  </p:clrMapOvr>
+</p:sld>
+</file>
+
+<file path=ppt/slides/slide13.xml><?xml version="1.0" encoding="utf-8"?>
+<p:sld xmlns:a="http://schemas.openxmlformats.org/drawingml/2006/main" xmlns:p="http://schemas.openxmlformats.org/presentationml/2006/main" xmlns:r="http://schemas.openxmlformats.org/officeDocument/2006/relationships">
+  <p:cSld>
+    <p:spTree>
+      <p:nvGrpSpPr>
+        <p:cNvPr id="1" name=""/>
+        <p:cNvGrpSpPr/>
+        <p:nvPr/>
+      </p:nvGrpSpPr>
+      <p:grpSpPr/>
+      <p:grpSp>
+        <p:nvGrpSpPr>
+          <p:cNvPr id="23" name="Group 22"/>
+          <p:cNvGrpSpPr/>
+          <p:nvPr/>
+        </p:nvGrpSpPr>
+        <p:grpSpPr>
+          <a:xfrm>
+            <a:off x="7973480" y="2948459"/>
+            <a:ext cx="3997396" cy="2867691"/>
+            <a:chOff x="1903674" y="2827807"/>
+            <a:chExt cx="3866269" cy="2867691"/>
+          </a:xfrm>
+        </p:grpSpPr>
+        <p:sp>
+          <p:nvSpPr>
+            <p:cNvPr id="24" name="Rounded Rectangle 23"/>
+            <p:cNvSpPr/>
+            <p:nvPr/>
+          </p:nvSpPr>
+          <p:spPr>
+            <a:xfrm>
+              <a:off x="2208474" y="3132607"/>
+              <a:ext cx="3561469" cy="2562891"/>
+            </a:xfrm>
+            <a:prstGeom prst="roundRect">
+              <a:avLst/>
+            </a:prstGeom>
+            <a:solidFill>
+              <a:schemeClr val="bg1"/>
+            </a:solidFill>
+            <a:ln w="19050" cmpd="sng">
+              <a:solidFill>
+                <a:schemeClr val="tx1"/>
+              </a:solidFill>
+              <a:prstDash val="dash"/>
+            </a:ln>
+          </p:spPr>
+          <p:style>
+            <a:lnRef idx="1">
+              <a:schemeClr val="accent4"/>
+            </a:lnRef>
+            <a:fillRef idx="3">
+              <a:schemeClr val="accent4"/>
+            </a:fillRef>
+            <a:effectRef idx="2">
+              <a:schemeClr val="accent4"/>
+            </a:effectRef>
+            <a:fontRef idx="minor">
+              <a:schemeClr val="lt1"/>
+            </a:fontRef>
+          </p:style>
+          <p:txBody>
+            <a:bodyPr rtlCol="0" anchor="b" anchorCtr="0"/>
+            <a:lstStyle/>
+            <a:p>
+              <a:pPr algn="ctr"/>
+              <a:r>
+                <a:rPr lang="en-US" sz="1400" dirty="0">
+                  <a:solidFill>
+                    <a:schemeClr val="tx1"/>
+                  </a:solidFill>
+                  <a:latin typeface="Helvetica"/>
+                  <a:cs typeface="Helvetica"/>
+                </a:rPr>
+                <a:t>Expectation</a:t>
+              </a:r>
+            </a:p>
+          </p:txBody>
+        </p:sp>
+        <p:sp>
+          <p:nvSpPr>
+            <p:cNvPr id="25" name="Rounded Rectangle 24"/>
+            <p:cNvSpPr/>
+            <p:nvPr/>
+          </p:nvSpPr>
+          <p:spPr>
+            <a:xfrm>
+              <a:off x="2056074" y="2980207"/>
+              <a:ext cx="3561469" cy="2562891"/>
+            </a:xfrm>
+            <a:prstGeom prst="roundRect">
+              <a:avLst/>
+            </a:prstGeom>
+            <a:solidFill>
+              <a:schemeClr val="bg1"/>
+            </a:solidFill>
+            <a:ln w="19050" cmpd="sng">
+              <a:solidFill>
+                <a:schemeClr val="tx1"/>
+              </a:solidFill>
+              <a:prstDash val="dash"/>
+            </a:ln>
+          </p:spPr>
+          <p:style>
+            <a:lnRef idx="1">
+              <a:schemeClr val="accent4"/>
+            </a:lnRef>
+            <a:fillRef idx="3">
+              <a:schemeClr val="accent4"/>
+            </a:fillRef>
+            <a:effectRef idx="2">
+              <a:schemeClr val="accent4"/>
+            </a:effectRef>
+            <a:fontRef idx="minor">
+              <a:schemeClr val="lt1"/>
+            </a:fontRef>
+          </p:style>
+          <p:txBody>
+            <a:bodyPr rtlCol="0" anchor="b" anchorCtr="0"/>
+            <a:lstStyle/>
+            <a:p>
+              <a:pPr algn="ctr"/>
+              <a:r>
+                <a:rPr lang="en-US" sz="1400" dirty="0">
+                  <a:solidFill>
+                    <a:schemeClr val="tx1"/>
+                  </a:solidFill>
+                  <a:latin typeface="Helvetica"/>
+                  <a:cs typeface="Helvetica"/>
+                </a:rPr>
+                <a:t>Expectation</a:t>
+              </a:r>
+            </a:p>
+          </p:txBody>
+        </p:sp>
+        <p:sp>
+          <p:nvSpPr>
+            <p:cNvPr id="26" name="Rounded Rectangle 25"/>
+            <p:cNvSpPr/>
+            <p:nvPr/>
+          </p:nvSpPr>
+          <p:spPr>
+            <a:xfrm>
+              <a:off x="1903674" y="2827807"/>
+              <a:ext cx="3561469" cy="2562891"/>
+            </a:xfrm>
+            <a:prstGeom prst="roundRect">
+              <a:avLst/>
+            </a:prstGeom>
+            <a:solidFill>
+              <a:schemeClr val="bg1"/>
+            </a:solidFill>
+            <a:ln w="19050" cmpd="sng">
+              <a:solidFill>
+                <a:schemeClr val="tx1"/>
+              </a:solidFill>
+              <a:prstDash val="dash"/>
+            </a:ln>
+          </p:spPr>
+          <p:style>
+            <a:lnRef idx="1">
+              <a:schemeClr val="accent4"/>
+            </a:lnRef>
+            <a:fillRef idx="3">
+              <a:schemeClr val="accent4"/>
+            </a:fillRef>
+            <a:effectRef idx="2">
+              <a:schemeClr val="accent4"/>
+            </a:effectRef>
+            <a:fontRef idx="minor">
+              <a:schemeClr val="lt1"/>
+            </a:fontRef>
+          </p:style>
+          <p:txBody>
+            <a:bodyPr rtlCol="0" anchor="b" anchorCtr="0"/>
+            <a:lstStyle/>
+            <a:p>
+              <a:pPr algn="ctr"/>
+              <a:r>
+                <a:rPr lang="en-US" sz="1400" dirty="0">
+                  <a:solidFill>
+                    <a:schemeClr val="tx1"/>
+                  </a:solidFill>
+                  <a:latin typeface="Helvetica"/>
+                  <a:cs typeface="Helvetica"/>
+                </a:rPr>
+                <a:t>Expectation</a:t>
+              </a:r>
+            </a:p>
+          </p:txBody>
+        </p:sp>
+      </p:grpSp>
+      <p:cxnSp>
+        <p:nvCxnSpPr>
+          <p:cNvPr id="17" name="Straight Arrow Connector 16"/>
+          <p:cNvCxnSpPr/>
+          <p:nvPr/>
+        </p:nvCxnSpPr>
+        <p:spPr>
+          <a:xfrm flipV="1">
+            <a:off x="6606318" y="3568479"/>
+            <a:ext cx="1260401" cy="1888"/>
+          </a:xfrm>
+          <a:prstGeom prst="straightConnector1">
+            <a:avLst/>
+          </a:prstGeom>
+          <a:ln>
+            <a:tailEnd type="arrow"/>
+          </a:ln>
+        </p:spPr>
+        <p:style>
+          <a:lnRef idx="2">
+            <a:schemeClr val="accent4"/>
+          </a:lnRef>
+          <a:fillRef idx="0">
+            <a:schemeClr val="accent4"/>
+          </a:fillRef>
+          <a:effectRef idx="1">
+            <a:schemeClr val="accent4"/>
+          </a:effectRef>
+          <a:fontRef idx="minor">
+            <a:schemeClr val="tx1"/>
+          </a:fontRef>
+        </p:style>
+      </p:cxnSp>
+      <p:sp>
+        <p:nvSpPr>
+          <p:cNvPr id="18" name="TextBox 17"/>
+          <p:cNvSpPr txBox="1"/>
+          <p:nvPr/>
+        </p:nvSpPr>
+        <p:spPr>
+          <a:xfrm>
+            <a:off x="6511199" y="3291482"/>
+            <a:ext cx="1553402" cy="276999"/>
+          </a:xfrm>
+          <a:prstGeom prst="rect">
+            <a:avLst/>
+          </a:prstGeom>
+          <a:noFill/>
+        </p:spPr>
+        <p:txBody>
+          <a:bodyPr wrap="square" rtlCol="0">
+            <a:spAutoFit/>
+          </a:bodyPr>
+          <a:lstStyle/>
+          <a:p>
+            <a:r>
+              <a:rPr lang="en-US" sz="1200" dirty="0"/>
+              <a:t>1. Receive Prompt</a:t>
+            </a:r>
+          </a:p>
+        </p:txBody>
+      </p:sp>
+      <p:sp>
+        <p:nvSpPr>
+          <p:cNvPr id="67" name="TextBox 66"/>
+          <p:cNvSpPr txBox="1"/>
+          <p:nvPr/>
+        </p:nvSpPr>
+        <p:spPr>
+          <a:xfrm>
+            <a:off x="6519097" y="4323714"/>
+            <a:ext cx="1553402" cy="276999"/>
+          </a:xfrm>
+          <a:prstGeom prst="rect">
+            <a:avLst/>
+          </a:prstGeom>
+          <a:noFill/>
+        </p:spPr>
+        <p:txBody>
+          <a:bodyPr wrap="square" rtlCol="0">
+            <a:spAutoFit/>
+          </a:bodyPr>
+          <a:lstStyle/>
+          <a:p>
+            <a:r>
+              <a:rPr lang="en-US" sz="1200" dirty="0"/>
+              <a:t>3. Stream Tokens</a:t>
+            </a:r>
+          </a:p>
+        </p:txBody>
+      </p:sp>
+      <p:sp>
+        <p:nvSpPr>
+          <p:cNvPr id="75" name="Rectangle 74"/>
+          <p:cNvSpPr/>
+          <p:nvPr/>
+        </p:nvSpPr>
+        <p:spPr>
+          <a:xfrm>
+            <a:off x="9469602" y="3238315"/>
+            <a:ext cx="940561" cy="664100"/>
+          </a:xfrm>
+          <a:prstGeom prst="rect">
+            <a:avLst/>
+          </a:prstGeom>
+          <a:solidFill>
+            <a:schemeClr val="bg1"/>
+          </a:solidFill>
+          <a:ln w="19050" cmpd="sng">
+            <a:solidFill>
+              <a:schemeClr val="tx1"/>
+            </a:solidFill>
+          </a:ln>
+        </p:spPr>
+        <p:style>
+          <a:lnRef idx="1">
+            <a:schemeClr val="accent4"/>
+          </a:lnRef>
+          <a:fillRef idx="3">
+            <a:schemeClr val="accent4"/>
+          </a:fillRef>
+          <a:effectRef idx="2">
+            <a:schemeClr val="accent4"/>
+          </a:effectRef>
+          <a:fontRef idx="minor">
+            <a:schemeClr val="lt1"/>
+          </a:fontRef>
+        </p:style>
+        <p:txBody>
+          <a:bodyPr lIns="91436" tIns="45718" rIns="91436" bIns="45718" rtlCol="0" anchor="ctr" anchorCtr="0"/>
+          <a:lstStyle/>
+          <a:p>
+            <a:pPr algn="ctr"/>
+            <a:r>
+              <a:rPr lang="en-US" sz="900" dirty="0">
+                <a:solidFill>
+                  <a:schemeClr val="tx1"/>
+                </a:solidFill>
+                <a:latin typeface="Helvetica"/>
+                <a:cs typeface="Helvetica"/>
+              </a:rPr>
+              <a:t>Request</a:t>
+            </a:r>
+          </a:p>
+          <a:p>
+            <a:pPr algn="ctr"/>
+            <a:r>
+              <a:rPr lang="en-US" sz="900" dirty="0">
+                <a:solidFill>
+                  <a:schemeClr val="tx1"/>
+                </a:solidFill>
+                <a:latin typeface="Helvetica"/>
+                <a:cs typeface="Helvetica"/>
+              </a:rPr>
+              <a:t>Matcher</a:t>
+            </a:r>
+          </a:p>
+        </p:txBody>
+      </p:sp>
+      <p:cxnSp>
+        <p:nvCxnSpPr>
+          <p:cNvPr id="88" name="Straight Arrow Connector 87"/>
+          <p:cNvCxnSpPr/>
+          <p:nvPr/>
+        </p:nvCxnSpPr>
+        <p:spPr>
+          <a:xfrm flipH="1" flipV="1">
+            <a:off x="6606316" y="4594953"/>
+            <a:ext cx="3567666" cy="2512"/>
+          </a:xfrm>
+          <a:prstGeom prst="straightConnector1">
+            <a:avLst/>
+          </a:prstGeom>
+          <a:ln>
+            <a:tailEnd type="triangle"/>
+          </a:ln>
+        </p:spPr>
+        <p:style>
+          <a:lnRef idx="2">
+            <a:schemeClr val="accent4"/>
+          </a:lnRef>
+          <a:fillRef idx="0">
+            <a:schemeClr val="accent4"/>
+          </a:fillRef>
+          <a:effectRef idx="1">
+            <a:schemeClr val="accent4"/>
+          </a:effectRef>
+          <a:fontRef idx="minor">
+            <a:schemeClr val="tx1"/>
+          </a:fontRef>
+        </p:style>
+      </p:cxnSp>
+      <p:sp>
+        <p:nvSpPr>
+          <p:cNvPr id="92" name="TextBox 91"/>
+          <p:cNvSpPr txBox="1"/>
+          <p:nvPr/>
+        </p:nvSpPr>
+        <p:spPr>
+          <a:xfrm>
+            <a:off x="8083349" y="3293474"/>
+            <a:ext cx="1553402" cy="276999"/>
+          </a:xfrm>
+          <a:prstGeom prst="rect">
+            <a:avLst/>
+          </a:prstGeom>
+          <a:noFill/>
+          <a:effectLst>
+            <a:softEdge rad="12700"/>
+          </a:effectLst>
+        </p:spPr>
+        <p:txBody>
+          <a:bodyPr wrap="square" rtlCol="0">
+            <a:spAutoFit/>
+          </a:bodyPr>
+          <a:lstStyle/>
+          <a:p>
+            <a:r>
+              <a:rPr lang="en-US" sz="1200" dirty="0"/>
+              <a:t>2. Match Request</a:t>
+            </a:r>
+          </a:p>
+        </p:txBody>
+      </p:sp>
+      <p:cxnSp>
+        <p:nvCxnSpPr>
+          <p:cNvPr id="101" name="Straight Arrow Connector 100"/>
+          <p:cNvCxnSpPr/>
+          <p:nvPr/>
+        </p:nvCxnSpPr>
+        <p:spPr>
+          <a:xfrm>
+            <a:off x="8178829" y="3570365"/>
+            <a:ext cx="1176446" cy="0"/>
+          </a:xfrm>
+          <a:prstGeom prst="straightConnector1">
+            <a:avLst/>
+          </a:prstGeom>
+          <a:ln>
+            <a:tailEnd type="triangle"/>
+          </a:ln>
+        </p:spPr>
+        <p:style>
+          <a:lnRef idx="2">
+            <a:schemeClr val="accent4"/>
+          </a:lnRef>
+          <a:fillRef idx="0">
+            <a:schemeClr val="accent4"/>
+          </a:fillRef>
+          <a:effectRef idx="1">
+            <a:schemeClr val="accent4"/>
+          </a:effectRef>
+          <a:fontRef idx="minor">
+            <a:schemeClr val="tx1"/>
+          </a:fontRef>
+        </p:style>
+      </p:cxnSp>
+      <p:sp>
+        <p:nvSpPr>
+          <p:cNvPr id="19" name="Rectangle 18"/>
+          <p:cNvSpPr/>
+          <p:nvPr/>
+        </p:nvSpPr>
+        <p:spPr>
+          <a:xfrm>
+            <a:off x="10305924" y="4278588"/>
+            <a:ext cx="940561" cy="664100"/>
+          </a:xfrm>
+          <a:prstGeom prst="rect">
+            <a:avLst/>
+          </a:prstGeom>
+          <a:solidFill>
+            <a:schemeClr val="bg1"/>
+          </a:solidFill>
+          <a:ln w="19050" cmpd="sng">
+            <a:solidFill>
+              <a:schemeClr val="tx1"/>
+            </a:solidFill>
+          </a:ln>
+        </p:spPr>
+        <p:style>
+          <a:lnRef idx="1">
+            <a:schemeClr val="accent4"/>
+          </a:lnRef>
+          <a:fillRef idx="3">
+            <a:schemeClr val="accent4"/>
+          </a:fillRef>
+          <a:effectRef idx="2">
+            <a:schemeClr val="accent4"/>
+          </a:effectRef>
+          <a:fontRef idx="minor">
+            <a:schemeClr val="lt1"/>
+          </a:fontRef>
+        </p:style>
+        <p:txBody>
+          <a:bodyPr lIns="91436" tIns="45718" rIns="91436" bIns="45718" rtlCol="0" anchor="ctr" anchorCtr="0"/>
+          <a:lstStyle/>
+          <a:p>
+            <a:pPr algn="ctr"/>
+            <a:r>
+              <a:rPr lang="en-US" sz="900" dirty="0">
+                <a:solidFill>
+                  <a:schemeClr val="tx1"/>
+                </a:solidFill>
+                <a:latin typeface="Helvetica"/>
+                <a:cs typeface="Helvetica"/>
+              </a:rPr>
+              <a:t>LLM</a:t>
+            </a:r>
+          </a:p>
+          <a:p>
+            <a:pPr algn="ctr"/>
+            <a:r>
+              <a:rPr lang="en-US" sz="900" dirty="0">
+                <a:solidFill>
+                  <a:schemeClr val="tx1"/>
+                </a:solidFill>
+                <a:latin typeface="Helvetica"/>
+                <a:cs typeface="Helvetica"/>
+              </a:rPr>
+              <a:t>Response</a:t>
+            </a:r>
+          </a:p>
+        </p:txBody>
+      </p:sp>
+      <p:cxnSp>
+        <p:nvCxnSpPr>
+          <p:cNvPr id="20" name="Elbow Connector 19"/>
+          <p:cNvCxnSpPr/>
+          <p:nvPr/>
+        </p:nvCxnSpPr>
+        <p:spPr>
+          <a:xfrm>
+            <a:off x="10410161" y="3570367"/>
+            <a:ext cx="366042" cy="708223"/>
+          </a:xfrm>
+          <a:prstGeom prst="bentConnector2">
+            <a:avLst/>
+          </a:prstGeom>
+          <a:ln>
+            <a:tailEnd type="triangle"/>
+          </a:ln>
+        </p:spPr>
+        <p:style>
+          <a:lnRef idx="2">
+            <a:schemeClr val="accent4"/>
+          </a:lnRef>
+          <a:fillRef idx="0">
+            <a:schemeClr val="accent4"/>
+          </a:fillRef>
+          <a:effectRef idx="1">
+            <a:schemeClr val="accent4"/>
+          </a:effectRef>
+          <a:fontRef idx="minor">
+            <a:schemeClr val="tx1"/>
+          </a:fontRef>
+        </p:style>
+      </p:cxnSp>
+    </p:spTree>
+  </p:cSld>
+  <p:clrMapOvr>
+    <a:masterClrMapping/>
+  </p:clrMapOvr>
+</p:sld>
+</file>
+
+<file path=ppt/slides/slide14.xml><?xml version="1.0" encoding="utf-8"?>
+<p:sld xmlns:a="http://schemas.openxmlformats.org/drawingml/2006/main" xmlns:p="http://schemas.openxmlformats.org/presentationml/2006/main" xmlns:r="http://schemas.openxmlformats.org/officeDocument/2006/relationships">
+  <p:cSld>
+    <p:spTree>
+      <p:nvGrpSpPr>
+        <p:cNvPr id="1" name=""/>
+        <p:cNvGrpSpPr/>
+        <p:nvPr/>
+      </p:nvGrpSpPr>
+      <p:grpSpPr/>
+      <p:cxnSp>
+        <p:nvCxnSpPr>
+          <p:cNvPr id="17" name="Straight Arrow Connector 16"/>
+          <p:cNvCxnSpPr/>
+          <p:nvPr/>
+        </p:nvCxnSpPr>
+        <p:spPr>
+          <a:xfrm flipV="1">
+            <a:off x="6606727" y="3566175"/>
+            <a:ext cx="1983406" cy="4192"/>
+          </a:xfrm>
+          <a:prstGeom prst="straightConnector1">
+            <a:avLst/>
+          </a:prstGeom>
+          <a:ln>
+            <a:tailEnd type="arrow"/>
+          </a:ln>
+        </p:spPr>
+        <p:style>
+          <a:lnRef idx="2">
+            <a:schemeClr val="accent1"/>
+          </a:lnRef>
+          <a:fillRef idx="0">
+            <a:schemeClr val="accent1"/>
+          </a:fillRef>
+          <a:effectRef idx="1">
+            <a:schemeClr val="accent1"/>
+          </a:effectRef>
+          <a:fontRef idx="minor">
+            <a:schemeClr val="tx1"/>
+          </a:fontRef>
+        </p:style>
+      </p:cxnSp>
+      <p:sp>
+        <p:nvSpPr>
+          <p:cNvPr id="18" name="TextBox 17"/>
+          <p:cNvSpPr txBox="1"/>
+          <p:nvPr/>
+        </p:nvSpPr>
+        <p:spPr>
+          <a:xfrm>
+            <a:off x="6521663" y="3291482"/>
+            <a:ext cx="2759008" cy="276999"/>
+          </a:xfrm>
+          <a:prstGeom prst="rect">
+            <a:avLst/>
+          </a:prstGeom>
+          <a:noFill/>
+        </p:spPr>
+        <p:txBody>
+          <a:bodyPr wrap="square" rtlCol="0">
+            <a:spAutoFit/>
+          </a:bodyPr>
+          <a:lstStyle/>
+          <a:p>
+            <a:r>
+              <a:rPr lang="en-US" sz="1200" dirty="0"/>
+              <a:t>3. Send Verification</a:t>
+            </a:r>
+          </a:p>
+        </p:txBody>
+      </p:sp>
+      <p:sp>
+        <p:nvSpPr>
+          <p:cNvPr id="67" name="TextBox 66"/>
+          <p:cNvSpPr txBox="1"/>
+          <p:nvPr/>
+        </p:nvSpPr>
+        <p:spPr>
+          <a:xfrm>
+            <a:off x="6521663" y="4121697"/>
+            <a:ext cx="1553402" cy="276999"/>
+          </a:xfrm>
+          <a:prstGeom prst="rect">
+            <a:avLst/>
+          </a:prstGeom>
+          <a:noFill/>
+        </p:spPr>
+        <p:txBody>
+          <a:bodyPr wrap="square" rtlCol="0">
+            <a:spAutoFit/>
+          </a:bodyPr>
+          <a:lstStyle/>
+          <a:p>
+            <a:r>
+              <a:rPr lang="en-US" sz="1200" dirty="0"/>
+              <a:t>5. Return Result</a:t>
+            </a:r>
+            <a:r>
+              <a:rPr lang="en-US" sz="1200"/>
+              <a:t/>
+            </a:r>
+            <a:r>
+              <a:rPr lang="en-US" sz="1200" dirty="0"/>
+              <a:t/>
+            </a:r>
+          </a:p>
+        </p:txBody>
+      </p:sp>
+      <p:cxnSp>
+        <p:nvCxnSpPr>
+          <p:cNvPr id="88" name="Straight Arrow Connector 87"/>
+          <p:cNvCxnSpPr/>
+          <p:nvPr/>
+        </p:nvCxnSpPr>
+        <p:spPr>
+          <a:xfrm rot="5400000">
+            <a:off x="7662580" y="2914941"/>
+            <a:ext cx="422144" cy="2533849"/>
+          </a:xfrm>
+          <a:prstGeom prst="bentConnector2">
+            <a:avLst/>
+          </a:prstGeom>
+          <a:ln>
+            <a:tailEnd type="triangle"/>
+          </a:ln>
+        </p:spPr>
+        <p:style>
+          <a:lnRef idx="2">
+            <a:schemeClr val="accent1"/>
+          </a:lnRef>
+          <a:fillRef idx="0">
+            <a:schemeClr val="accent1"/>
+          </a:fillRef>
+          <a:effectRef idx="1">
+            <a:schemeClr val="accent1"/>
+          </a:effectRef>
+          <a:fontRef idx="minor">
+            <a:schemeClr val="tx1"/>
+          </a:fontRef>
+        </p:style>
+      </p:cxnSp>
+      <p:sp>
+        <p:nvSpPr>
+          <p:cNvPr id="2" name="Can 1"/>
+          <p:cNvSpPr/>
+          <p:nvPr/>
+        </p:nvSpPr>
+        <p:spPr>
+          <a:xfrm>
+            <a:off x="11173710" y="3122264"/>
+            <a:ext cx="988828" cy="868444"/>
+          </a:xfrm>
+          <a:prstGeom prst="can">
+            <a:avLst/>
+          </a:prstGeom>
+          <a:solidFill>
+            <a:schemeClr val="bg1"/>
+          </a:solidFill>
+          <a:ln w="19050" cmpd="sng">
+            <a:solidFill>
+              <a:schemeClr val="tx1"/>
+            </a:solidFill>
+          </a:ln>
+        </p:spPr>
+        <p:style>
+          <a:lnRef idx="1">
+            <a:schemeClr val="accent1"/>
+          </a:lnRef>
+          <a:fillRef idx="3">
+            <a:schemeClr val="accent1"/>
+          </a:fillRef>
+          <a:effectRef idx="2">
+            <a:schemeClr val="accent1"/>
+          </a:effectRef>
+          <a:fontRef idx="minor">
+            <a:schemeClr val="lt1"/>
+          </a:fontRef>
+        </p:style>
+        <p:txBody>
+          <a:bodyPr lIns="91436" tIns="45718" rIns="91436" bIns="45718" rtlCol="0" anchor="ctr" anchorCtr="0"/>
+          <a:lstStyle/>
+          <a:p>
+            <a:pPr algn="ctr"/>
+            <a:r>
+              <a:rPr lang="en-US" sz="900" dirty="0">
+                <a:solidFill>
+                  <a:schemeClr val="tx1"/>
+                </a:solidFill>
+                <a:latin typeface="Helvetica"/>
+                <a:cs typeface="Helvetica"/>
+              </a:rPr>
+              <a:t>Recorded</a:t>
+            </a:r>
+          </a:p>
+          <a:p>
+            <a:pPr algn="ctr"/>
+            <a:r>
+              <a:rPr lang="en-US" sz="900" dirty="0">
+                <a:solidFill>
+                  <a:schemeClr val="tx1"/>
+                </a:solidFill>
+                <a:latin typeface="Helvetica"/>
+                <a:cs typeface="Helvetica"/>
+              </a:rPr>
+              <a:t>Responses</a:t>
+            </a:r>
+          </a:p>
+        </p:txBody>
+      </p:sp>
+      <p:sp>
+        <p:nvSpPr>
+          <p:cNvPr id="21" name="Rectangle 20"/>
+          <p:cNvSpPr/>
+          <p:nvPr/>
+        </p:nvSpPr>
+        <p:spPr>
+          <a:xfrm>
+            <a:off x="8664564" y="3242893"/>
+            <a:ext cx="940561" cy="664100"/>
+          </a:xfrm>
+          <a:prstGeom prst="rect">
+            <a:avLst/>
+          </a:prstGeom>
+          <a:solidFill>
+            <a:schemeClr val="bg1"/>
+          </a:solidFill>
+          <a:ln w="19050" cmpd="sng">
+            <a:solidFill>
+              <a:schemeClr val="tx1"/>
+            </a:solidFill>
+          </a:ln>
+        </p:spPr>
+        <p:style>
+          <a:lnRef idx="1">
+            <a:schemeClr val="accent1"/>
+          </a:lnRef>
+          <a:fillRef idx="3">
+            <a:schemeClr val="accent1"/>
+          </a:fillRef>
+          <a:effectRef idx="2">
+            <a:schemeClr val="accent1"/>
+          </a:effectRef>
+          <a:fontRef idx="minor">
+            <a:schemeClr val="lt1"/>
+          </a:fontRef>
+        </p:style>
+        <p:txBody>
+          <a:bodyPr lIns="91436" tIns="45718" rIns="91436" bIns="45718" rtlCol="0" anchor="ctr" anchorCtr="0"/>
+          <a:lstStyle/>
+          <a:p>
+            <a:pPr algn="ctr"/>
+            <a:r>
+              <a:rPr lang="en-US" sz="900" dirty="0">
+                <a:solidFill>
+                  <a:schemeClr val="tx1"/>
+                </a:solidFill>
+                <a:latin typeface="Helvetica"/>
+                <a:cs typeface="Helvetica"/>
+              </a:rPr>
+              <a:t>Request</a:t>
+            </a:r>
+          </a:p>
+          <a:p>
+            <a:pPr algn="ctr"/>
+            <a:r>
+              <a:rPr lang="en-US" sz="900" dirty="0">
+                <a:solidFill>
+                  <a:schemeClr val="tx1"/>
+                </a:solidFill>
+                <a:latin typeface="Helvetica"/>
+                <a:cs typeface="Helvetica"/>
+              </a:rPr>
+              <a:t>Matcher</a:t>
+            </a:r>
+          </a:p>
+        </p:txBody>
+      </p:sp>
+      <p:cxnSp>
+        <p:nvCxnSpPr>
+          <p:cNvPr id="7" name="Straight Arrow Connector 6"/>
+          <p:cNvCxnSpPr/>
+          <p:nvPr/>
+        </p:nvCxnSpPr>
+        <p:spPr>
+          <a:xfrm>
+            <a:off x="9714192" y="3567122"/>
+            <a:ext cx="1355774" cy="7823"/>
+          </a:xfrm>
+          <a:prstGeom prst="straightConnector1">
+            <a:avLst/>
+          </a:prstGeom>
+          <a:ln>
+            <a:headEnd type="triangle"/>
+            <a:tailEnd type="triangle"/>
+          </a:ln>
+        </p:spPr>
+        <p:style>
+          <a:lnRef idx="2">
+            <a:schemeClr val="accent1"/>
+          </a:lnRef>
+          <a:fillRef idx="0">
+            <a:schemeClr val="accent1"/>
+          </a:fillRef>
+          <a:effectRef idx="1">
+            <a:schemeClr val="accent1"/>
+          </a:effectRef>
+          <a:fontRef idx="minor">
+            <a:schemeClr val="tx1"/>
+          </a:fontRef>
+        </p:style>
+      </p:cxnSp>
+      <p:sp>
+        <p:nvSpPr>
+          <p:cNvPr id="28" name="TextBox 27"/>
+          <p:cNvSpPr txBox="1"/>
+          <p:nvPr/>
+        </p:nvSpPr>
+        <p:spPr>
+          <a:xfrm>
+            <a:off x="9639761" y="3274794"/>
+            <a:ext cx="1553402" cy="276999"/>
+          </a:xfrm>
+          <a:prstGeom prst="rect">
+            <a:avLst/>
+          </a:prstGeom>
+          <a:noFill/>
+        </p:spPr>
+        <p:txBody>
+          <a:bodyPr wrap="square" rtlCol="0">
+            <a:spAutoFit/>
+          </a:bodyPr>
+          <a:lstStyle/>
+          <a:p>
+            <a:r>
+              <a:rPr lang="en-US" sz="1200" dirty="0"/>
+              <a:t>4. Match Response(s)</a:t>
+            </a:r>
+          </a:p>
+        </p:txBody>
+      </p:sp>
+      <p:sp>
+        <p:nvSpPr>
+          <p:cNvPr id="31" name="Rounded Rectangle 30"/>
+          <p:cNvSpPr/>
+          <p:nvPr/>
+        </p:nvSpPr>
+        <p:spPr>
+          <a:xfrm>
+            <a:off x="8457229" y="1823774"/>
+            <a:ext cx="1355231" cy="1012102"/>
+          </a:xfrm>
+          <a:prstGeom prst="roundRect">
+            <a:avLst/>
+          </a:prstGeom>
+          <a:solidFill>
+            <a:schemeClr val="bg1"/>
+          </a:solidFill>
+          <a:ln w="19050" cmpd="sng">
+            <a:solidFill>
+              <a:schemeClr val="tx1">
+                <a:lumMod val="50000"/>
+                <a:lumOff val="50000"/>
+                <a:alpha val="70000"/>
+              </a:schemeClr>
+            </a:solidFill>
+            <a:prstDash val="dash"/>
+          </a:ln>
+        </p:spPr>
+        <p:style>
+          <a:lnRef idx="1">
+            <a:schemeClr val="accent1"/>
+          </a:lnRef>
+          <a:fillRef idx="3">
+            <a:schemeClr val="accent1"/>
+          </a:fillRef>
+          <a:effectRef idx="2">
+            <a:schemeClr val="accent1"/>
+          </a:effectRef>
+          <a:fontRef idx="minor">
+            <a:schemeClr val="lt1"/>
+          </a:fontRef>
+        </p:style>
+        <p:txBody>
+          <a:bodyPr rtlCol="0" anchor="ctr" anchorCtr="0"/>
+          <a:lstStyle/>
+          <a:p>
+            <a:pPr algn="ctr"/>
+            <a:r>
+              <a:rPr lang="en-US" sz="1200" dirty="0">
+                <a:solidFill>
+                  <a:schemeClr val="bg1">
+                    <a:lumMod val="50000"/>
+                  </a:schemeClr>
+                </a:solidFill>
+                <a:latin typeface="Helvetica"/>
+                <a:cs typeface="Helvetica"/>
+              </a:rPr>
+              <a:t>Expectation</a:t>
+            </a:r>
+          </a:p>
+          <a:p>
+            <a:pPr algn="ctr"/>
+            <a:r>
+              <a:rPr lang="en-US" sz="1200" dirty="0">
+                <a:solidFill>
+                  <a:schemeClr val="bg1">
+                    <a:lumMod val="50000"/>
+                  </a:schemeClr>
+                </a:solidFill>
+                <a:latin typeface="Helvetica"/>
+                <a:cs typeface="Helvetica"/>
+              </a:rPr>
+              <a:t>or</a:t>
+            </a:r>
+          </a:p>
+          <a:p>
+            <a:pPr algn="ctr"/>
+            <a:r>
+              <a:rPr lang="en-US" sz="1200" dirty="0">
+                <a:solidFill>
+                  <a:schemeClr val="bg1">
+                    <a:lumMod val="50000"/>
+                  </a:schemeClr>
+                </a:solidFill>
+                <a:latin typeface="Helvetica"/>
+                <a:cs typeface="Helvetica"/>
+              </a:rPr>
+              <a:t>Proxy</a:t>
+            </a:r>
+          </a:p>
+        </p:txBody>
+      </p:sp>
+      <p:cxnSp>
+        <p:nvCxnSpPr>
+          <p:cNvPr id="32" name="Straight Arrow Connector 31"/>
+          <p:cNvCxnSpPr/>
+          <p:nvPr/>
+        </p:nvCxnSpPr>
+        <p:spPr>
+          <a:xfrm flipV="1">
+            <a:off x="6606729" y="2326837"/>
+            <a:ext cx="1764891" cy="1888"/>
+          </a:xfrm>
+          <a:prstGeom prst="straightConnector1">
+            <a:avLst/>
+          </a:prstGeom>
+          <a:ln>
+            <a:solidFill>
+              <a:schemeClr val="accent1">
+                <a:alpha val="70000"/>
+              </a:schemeClr>
+            </a:solidFill>
+            <a:tailEnd type="arrow"/>
+          </a:ln>
+        </p:spPr>
+        <p:style>
+          <a:lnRef idx="2">
+            <a:schemeClr val="accent1"/>
+          </a:lnRef>
+          <a:fillRef idx="0">
+            <a:schemeClr val="accent1"/>
+          </a:fillRef>
+          <a:effectRef idx="1">
+            <a:schemeClr val="accent1"/>
+          </a:effectRef>
+          <a:fontRef idx="minor">
+            <a:schemeClr val="tx1"/>
+          </a:fontRef>
+        </p:style>
+      </p:cxnSp>
+      <p:sp>
+        <p:nvSpPr>
+          <p:cNvPr id="33" name="TextBox 32"/>
+          <p:cNvSpPr txBox="1"/>
+          <p:nvPr/>
+        </p:nvSpPr>
+        <p:spPr>
+          <a:xfrm>
+            <a:off x="6521665" y="2049840"/>
+            <a:ext cx="1715807" cy="276999"/>
+          </a:xfrm>
+          <a:prstGeom prst="rect">
+            <a:avLst/>
+          </a:prstGeom>
+          <a:noFill/>
+        </p:spPr>
+        <p:txBody>
+          <a:bodyPr wrap="square" rtlCol="0">
+            <a:spAutoFit/>
+          </a:bodyPr>
+          <a:lstStyle/>
+          <a:p>
+            <a:r>
+              <a:rPr lang="en-US" sz="1200" dirty="0">
+                <a:solidFill>
+                  <a:schemeClr val="bg1">
+                    <a:lumMod val="50000"/>
+                  </a:schemeClr>
+                </a:solidFill>
+              </a:rPr>
+              <a:t>1. Receive Request</a:t>
+            </a:r>
+          </a:p>
+        </p:txBody>
+      </p:sp>
+      <p:cxnSp>
+        <p:nvCxnSpPr>
+          <p:cNvPr id="22" name="Elbow Connector 21"/>
+          <p:cNvCxnSpPr/>
+          <p:nvPr/>
+        </p:nvCxnSpPr>
+        <p:spPr>
+          <a:xfrm>
+            <a:off x="9876256" y="2329825"/>
+            <a:ext cx="1783814" cy="741880"/>
+          </a:xfrm>
+          <a:prstGeom prst="bentConnector2">
+            <a:avLst/>
+          </a:prstGeom>
+          <a:ln>
+            <a:solidFill>
+              <a:schemeClr val="accent1">
+                <a:alpha val="70000"/>
+              </a:schemeClr>
+            </a:solidFill>
+            <a:tailEnd type="triangle"/>
+          </a:ln>
+        </p:spPr>
+        <p:style>
+          <a:lnRef idx="2">
+            <a:schemeClr val="accent1"/>
+          </a:lnRef>
+          <a:fillRef idx="0">
+            <a:schemeClr val="accent1"/>
+          </a:fillRef>
+          <a:effectRef idx="1">
+            <a:schemeClr val="accent1"/>
+          </a:effectRef>
+          <a:fontRef idx="minor">
+            <a:schemeClr val="tx1"/>
+          </a:fontRef>
+        </p:style>
+      </p:cxnSp>
+      <p:sp>
+        <p:nvSpPr>
+          <p:cNvPr id="38" name="TextBox 37"/>
+          <p:cNvSpPr txBox="1"/>
+          <p:nvPr/>
+        </p:nvSpPr>
+        <p:spPr>
+          <a:xfrm>
+            <a:off x="9812460" y="2060473"/>
+            <a:ext cx="1715807" cy="276999"/>
+          </a:xfrm>
+          <a:prstGeom prst="rect">
+            <a:avLst/>
+          </a:prstGeom>
+          <a:noFill/>
+        </p:spPr>
+        <p:txBody>
+          <a:bodyPr wrap="square" rtlCol="0">
+            <a:spAutoFit/>
+          </a:bodyPr>
+          <a:lstStyle/>
+          <a:p>
+            <a:r>
+              <a:rPr lang="en-US" sz="1200" dirty="0">
+                <a:solidFill>
+                  <a:schemeClr val="bg1">
+                    <a:lumMod val="50000"/>
+                  </a:schemeClr>
+                </a:solidFill>
+              </a:rPr>
+              <a:t>2. Record Response</a:t>
+            </a:r>
+          </a:p>
+        </p:txBody>
+      </p:sp>
+    </p:spTree>
+  </p:cSld>
+  <p:clrMapOvr>
+    <a:masterClrMapping/>
+  </p:clrMapOvr>
+</p:sld>
+</file>
+
+<file path=ppt/slides/slide15.xml><?xml version="1.0" encoding="utf-8"?>
+<p:sld xmlns:a="http://schemas.openxmlformats.org/drawingml/2006/main" xmlns:p="http://schemas.openxmlformats.org/presentationml/2006/main" xmlns:r="http://schemas.openxmlformats.org/officeDocument/2006/relationships">
+  <p:cSld>
+    <p:spTree>
+      <p:nvGrpSpPr>
+        <p:cNvPr id="1" name=""/>
+        <p:cNvGrpSpPr/>
+        <p:nvPr/>
+      </p:nvGrpSpPr>
+      <p:grpSpPr/>
+      <p:cxnSp>
+        <p:nvCxnSpPr>
+          <p:cNvPr id="17" name="Straight Arrow Connector 16"/>
+          <p:cNvCxnSpPr/>
+          <p:nvPr/>
+        </p:nvCxnSpPr>
+        <p:spPr>
+          <a:xfrm flipV="1">
+            <a:off x="6606727" y="3566175"/>
+            <a:ext cx="1983406" cy="4192"/>
+          </a:xfrm>
+          <a:prstGeom prst="straightConnector1">
+            <a:avLst/>
+          </a:prstGeom>
+          <a:ln>
+            <a:tailEnd type="arrow"/>
+          </a:ln>
+        </p:spPr>
+        <p:style>
+          <a:lnRef idx="2">
+            <a:schemeClr val="accent5"/>
+          </a:lnRef>
+          <a:fillRef idx="0">
+            <a:schemeClr val="accent5"/>
+          </a:fillRef>
+          <a:effectRef idx="1">
+            <a:schemeClr val="accent5"/>
+          </a:effectRef>
+          <a:fontRef idx="minor">
+            <a:schemeClr val="tx1"/>
+          </a:fontRef>
+        </p:style>
+      </p:cxnSp>
+      <p:sp>
+        <p:nvSpPr>
+          <p:cNvPr id="18" name="TextBox 17"/>
+          <p:cNvSpPr txBox="1"/>
+          <p:nvPr/>
+        </p:nvSpPr>
+        <p:spPr>
+          <a:xfrm>
+            <a:off x="6521663" y="3291482"/>
+            <a:ext cx="2759008" cy="276999"/>
+          </a:xfrm>
+          <a:prstGeom prst="rect">
+            <a:avLst/>
+          </a:prstGeom>
+          <a:noFill/>
+        </p:spPr>
+        <p:txBody>
+          <a:bodyPr wrap="square" rtlCol="0">
+            <a:spAutoFit/>
+          </a:bodyPr>
+          <a:lstStyle/>
+          <a:p>
+            <a:r>
+              <a:rPr lang="en-US" sz="1200" dirty="0"/>
+              <a:t>3. Request Brief</a:t>
+            </a:r>
+          </a:p>
+        </p:txBody>
+      </p:sp>
+      <p:sp>
+        <p:nvSpPr>
+          <p:cNvPr id="67" name="TextBox 66"/>
+          <p:cNvSpPr txBox="1"/>
+          <p:nvPr/>
+        </p:nvSpPr>
+        <p:spPr>
+          <a:xfrm>
+            <a:off x="6521663" y="4121697"/>
+            <a:ext cx="1553402" cy="276999"/>
+          </a:xfrm>
+          <a:prstGeom prst="rect">
+            <a:avLst/>
+          </a:prstGeom>
+          <a:noFill/>
+        </p:spPr>
+        <p:txBody>
+          <a:bodyPr wrap="square" rtlCol="0">
+            <a:spAutoFit/>
+          </a:bodyPr>
+          <a:lstStyle/>
+          <a:p>
+            <a:r>
+              <a:rPr lang="en-US" sz="1200" dirty="0"/>
+              <a:t>5. Export Brief</a:t>
+            </a:r>
+            <a:r>
+              <a:rPr lang="en-US" sz="1200"/>
+              <a:t/>
+            </a:r>
+            <a:r>
+              <a:rPr lang="en-US" sz="1200" dirty="0"/>
+              <a:t/>
+            </a:r>
+          </a:p>
+        </p:txBody>
+      </p:sp>
+      <p:cxnSp>
+        <p:nvCxnSpPr>
+          <p:cNvPr id="88" name="Straight Arrow Connector 87"/>
+          <p:cNvCxnSpPr/>
+          <p:nvPr/>
+        </p:nvCxnSpPr>
+        <p:spPr>
+          <a:xfrm rot="5400000">
+            <a:off x="7662580" y="2914941"/>
+            <a:ext cx="422144" cy="2533849"/>
+          </a:xfrm>
+          <a:prstGeom prst="bentConnector2">
+            <a:avLst/>
+          </a:prstGeom>
+          <a:ln>
+            <a:tailEnd type="triangle"/>
+          </a:ln>
+        </p:spPr>
+        <p:style>
+          <a:lnRef idx="2">
+            <a:schemeClr val="accent5"/>
+          </a:lnRef>
+          <a:fillRef idx="0">
+            <a:schemeClr val="accent5"/>
+          </a:fillRef>
+          <a:effectRef idx="1">
+            <a:schemeClr val="accent5"/>
+          </a:effectRef>
+          <a:fontRef idx="minor">
+            <a:schemeClr val="tx1"/>
+          </a:fontRef>
+        </p:style>
+      </p:cxnSp>
+      <p:sp>
+        <p:nvSpPr>
+          <p:cNvPr id="2" name="Can 1"/>
+          <p:cNvSpPr/>
+          <p:nvPr/>
+        </p:nvSpPr>
+        <p:spPr>
+          <a:xfrm>
+            <a:off x="11173710" y="3122264"/>
+            <a:ext cx="988828" cy="868444"/>
+          </a:xfrm>
+          <a:prstGeom prst="can">
+            <a:avLst/>
+          </a:prstGeom>
+          <a:solidFill>
+            <a:schemeClr val="bg1"/>
+          </a:solidFill>
+          <a:ln w="19050" cmpd="sng">
+            <a:solidFill>
+              <a:schemeClr val="tx1"/>
+            </a:solidFill>
+          </a:ln>
+        </p:spPr>
+        <p:style>
+          <a:lnRef idx="1">
+            <a:schemeClr val="accent5"/>
+          </a:lnRef>
+          <a:fillRef idx="3">
+            <a:schemeClr val="accent5"/>
+          </a:fillRef>
+          <a:effectRef idx="2">
+            <a:schemeClr val="accent5"/>
+          </a:effectRef>
+          <a:fontRef idx="minor">
+            <a:schemeClr val="lt1"/>
+          </a:fontRef>
+        </p:style>
+        <p:txBody>
+          <a:bodyPr lIns="91436" tIns="45718" rIns="91436" bIns="45718" rtlCol="0" anchor="ctr" anchorCtr="0"/>
+          <a:lstStyle/>
+          <a:p>
+            <a:pPr algn="ctr"/>
+            <a:r>
+              <a:rPr lang="en-US" sz="900" dirty="0">
+                <a:solidFill>
+                  <a:schemeClr val="tx1"/>
+                </a:solidFill>
+                <a:latin typeface="Helvetica"/>
+                <a:cs typeface="Helvetica"/>
+              </a:rPr>
+              <a:t>LLM</a:t>
+            </a:r>
+          </a:p>
+          <a:p>
+            <a:pPr algn="ctr"/>
+            <a:r>
+              <a:rPr lang="en-US" sz="900" dirty="0">
+                <a:solidFill>
+                  <a:schemeClr val="tx1"/>
+                </a:solidFill>
+                <a:latin typeface="Helvetica"/>
+                <a:cs typeface="Helvetica"/>
+              </a:rPr>
+              <a:t>Traffic</a:t>
+            </a:r>
+          </a:p>
+        </p:txBody>
+      </p:sp>
+      <p:sp>
+        <p:nvSpPr>
+          <p:cNvPr id="21" name="Rectangle 20"/>
+          <p:cNvSpPr/>
+          <p:nvPr/>
+        </p:nvSpPr>
+        <p:spPr>
+          <a:xfrm>
+            <a:off x="8664564" y="3242893"/>
+            <a:ext cx="940561" cy="664100"/>
+          </a:xfrm>
+          <a:prstGeom prst="rect">
+            <a:avLst/>
+          </a:prstGeom>
+          <a:solidFill>
+            <a:schemeClr val="bg1"/>
+          </a:solidFill>
+          <a:ln w="19050" cmpd="sng">
+            <a:solidFill>
+              <a:schemeClr val="tx1"/>
+            </a:solidFill>
+          </a:ln>
+        </p:spPr>
+        <p:style>
+          <a:lnRef idx="1">
+            <a:schemeClr val="accent5"/>
+          </a:lnRef>
+          <a:fillRef idx="3">
+            <a:schemeClr val="accent5"/>
+          </a:fillRef>
+          <a:effectRef idx="2">
+            <a:schemeClr val="accent5"/>
+          </a:effectRef>
+          <a:fontRef idx="minor">
+            <a:schemeClr val="lt1"/>
+          </a:fontRef>
+        </p:style>
+        <p:txBody>
+          <a:bodyPr lIns="91436" tIns="45718" rIns="91436" bIns="45718" rtlCol="0" anchor="ctr" anchorCtr="0"/>
+          <a:lstStyle/>
+          <a:p>
+            <a:pPr algn="ctr"/>
+            <a:r>
+              <a:rPr lang="en-US" sz="900" dirty="0">
+                <a:solidFill>
+                  <a:schemeClr val="tx1"/>
+                </a:solidFill>
+                <a:latin typeface="Helvetica"/>
+                <a:cs typeface="Helvetica"/>
+              </a:rPr>
+              <a:t>Request</a:t>
+            </a:r>
+          </a:p>
+          <a:p>
+            <a:pPr algn="ctr"/>
+            <a:r>
+              <a:rPr lang="en-US" sz="900" dirty="0">
+                <a:solidFill>
+                  <a:schemeClr val="tx1"/>
+                </a:solidFill>
+                <a:latin typeface="Helvetica"/>
+                <a:cs typeface="Helvetica"/>
+              </a:rPr>
+              <a:t>Matcher</a:t>
+            </a:r>
+          </a:p>
+        </p:txBody>
+      </p:sp>
+      <p:cxnSp>
+        <p:nvCxnSpPr>
+          <p:cNvPr id="7" name="Straight Arrow Connector 6"/>
+          <p:cNvCxnSpPr/>
+          <p:nvPr/>
+        </p:nvCxnSpPr>
+        <p:spPr>
+          <a:xfrm>
+            <a:off x="9714192" y="3567122"/>
+            <a:ext cx="1355774" cy="7823"/>
+          </a:xfrm>
+          <a:prstGeom prst="straightConnector1">
+            <a:avLst/>
+          </a:prstGeom>
+          <a:ln>
+            <a:headEnd type="triangle"/>
+            <a:tailEnd type="triangle"/>
+          </a:ln>
+        </p:spPr>
+        <p:style>
+          <a:lnRef idx="2">
+            <a:schemeClr val="accent5"/>
+          </a:lnRef>
+          <a:fillRef idx="0">
+            <a:schemeClr val="accent5"/>
+          </a:fillRef>
+          <a:effectRef idx="1">
+            <a:schemeClr val="accent5"/>
+          </a:effectRef>
+          <a:fontRef idx="minor">
+            <a:schemeClr val="tx1"/>
+          </a:fontRef>
+        </p:style>
+      </p:cxnSp>
+      <p:sp>
+        <p:nvSpPr>
+          <p:cNvPr id="28" name="TextBox 27"/>
+          <p:cNvSpPr txBox="1"/>
+          <p:nvPr/>
+        </p:nvSpPr>
+        <p:spPr>
+          <a:xfrm>
+            <a:off x="9639761" y="3274794"/>
+            <a:ext cx="1553402" cy="276999"/>
+          </a:xfrm>
+          <a:prstGeom prst="rect">
+            <a:avLst/>
+          </a:prstGeom>
+          <a:noFill/>
+        </p:spPr>
+        <p:txBody>
+          <a:bodyPr wrap="square" rtlCol="0">
+            <a:spAutoFit/>
+          </a:bodyPr>
+          <a:lstStyle/>
+          <a:p>
+            <a:r>
+              <a:rPr lang="en-US" sz="1200" dirty="0"/>
+              <a:t>4. Analyse Traffic</a:t>
+            </a:r>
+          </a:p>
+        </p:txBody>
+      </p:sp>
+      <p:sp>
+        <p:nvSpPr>
+          <p:cNvPr id="31" name="Rounded Rectangle 30"/>
+          <p:cNvSpPr/>
+          <p:nvPr/>
+        </p:nvSpPr>
+        <p:spPr>
+          <a:xfrm>
+            <a:off x="8457229" y="1823774"/>
+            <a:ext cx="1355231" cy="1012102"/>
+          </a:xfrm>
+          <a:prstGeom prst="roundRect">
+            <a:avLst/>
+          </a:prstGeom>
+          <a:solidFill>
+            <a:schemeClr val="bg1"/>
+          </a:solidFill>
+          <a:ln w="19050" cmpd="sng">
+            <a:solidFill>
+              <a:schemeClr val="tx1">
+                <a:lumMod val="50000"/>
+                <a:lumOff val="50000"/>
+                <a:alpha val="70000"/>
+              </a:schemeClr>
+            </a:solidFill>
+            <a:prstDash val="dash"/>
+          </a:ln>
+        </p:spPr>
+        <p:style>
+          <a:lnRef idx="1">
+            <a:schemeClr val="accent5"/>
+          </a:lnRef>
+          <a:fillRef idx="3">
+            <a:schemeClr val="accent5"/>
+          </a:fillRef>
+          <a:effectRef idx="2">
+            <a:schemeClr val="accent5"/>
+          </a:effectRef>
+          <a:fontRef idx="minor">
+            <a:schemeClr val="lt1"/>
+          </a:fontRef>
+        </p:style>
+        <p:txBody>
+          <a:bodyPr rtlCol="0" anchor="ctr" anchorCtr="0"/>
+          <a:lstStyle/>
+          <a:p>
+            <a:pPr algn="ctr"/>
+            <a:r>
+              <a:rPr lang="en-US" sz="1200" dirty="0">
+                <a:solidFill>
+                  <a:schemeClr val="bg1">
+                    <a:lumMod val="50000"/>
+                  </a:schemeClr>
+                </a:solidFill>
+                <a:latin typeface="Helvetica"/>
+                <a:cs typeface="Helvetica"/>
+              </a:rPr>
+              <a:t>Proxy</a:t>
+            </a:r>
+          </a:p>
+        </p:txBody>
+      </p:sp>
+      <p:cxnSp>
+        <p:nvCxnSpPr>
+          <p:cNvPr id="32" name="Straight Arrow Connector 31"/>
+          <p:cNvCxnSpPr/>
+          <p:nvPr/>
+        </p:nvCxnSpPr>
+        <p:spPr>
+          <a:xfrm flipV="1">
+            <a:off x="6606729" y="2326837"/>
+            <a:ext cx="1764891" cy="1888"/>
+          </a:xfrm>
+          <a:prstGeom prst="straightConnector1">
+            <a:avLst/>
+          </a:prstGeom>
+          <a:ln>
+            <a:solidFill>
+              <a:schemeClr val="accent5">
+                <a:alpha val="70000"/>
+              </a:schemeClr>
+            </a:solidFill>
+            <a:tailEnd type="arrow"/>
+          </a:ln>
+        </p:spPr>
+        <p:style>
+          <a:lnRef idx="2">
+            <a:schemeClr val="accent5"/>
+          </a:lnRef>
+          <a:fillRef idx="0">
+            <a:schemeClr val="accent5"/>
+          </a:fillRef>
+          <a:effectRef idx="1">
+            <a:schemeClr val="accent5"/>
+          </a:effectRef>
+          <a:fontRef idx="minor">
+            <a:schemeClr val="tx1"/>
+          </a:fontRef>
+        </p:style>
+      </p:cxnSp>
+      <p:sp>
+        <p:nvSpPr>
+          <p:cNvPr id="33" name="TextBox 32"/>
+          <p:cNvSpPr txBox="1"/>
+          <p:nvPr/>
+        </p:nvSpPr>
+        <p:spPr>
+          <a:xfrm>
+            <a:off x="6521665" y="2049840"/>
+            <a:ext cx="1715807" cy="276999"/>
+          </a:xfrm>
+          <a:prstGeom prst="rect">
+            <a:avLst/>
+          </a:prstGeom>
+          <a:noFill/>
+        </p:spPr>
+        <p:txBody>
+          <a:bodyPr wrap="square" rtlCol="0">
+            <a:spAutoFit/>
+          </a:bodyPr>
+          <a:lstStyle/>
+          <a:p>
+            <a:r>
+              <a:rPr lang="en-US" sz="1200" dirty="0">
+                <a:solidFill>
+                  <a:schemeClr val="bg1">
+                    <a:lumMod val="50000"/>
+                  </a:schemeClr>
+                </a:solidFill>
+              </a:rPr>
+              <a:t>1. Proxy LLM Call</a:t>
+            </a:r>
+          </a:p>
+        </p:txBody>
+      </p:sp>
+      <p:cxnSp>
+        <p:nvCxnSpPr>
+          <p:cNvPr id="22" name="Elbow Connector 21"/>
+          <p:cNvCxnSpPr/>
+          <p:nvPr/>
+        </p:nvCxnSpPr>
+        <p:spPr>
+          <a:xfrm>
+            <a:off x="9876256" y="2329825"/>
+            <a:ext cx="1783814" cy="741880"/>
+          </a:xfrm>
+          <a:prstGeom prst="bentConnector2">
+            <a:avLst/>
+          </a:prstGeom>
+          <a:ln>
+            <a:solidFill>
+              <a:schemeClr val="accent5">
+                <a:alpha val="70000"/>
+              </a:schemeClr>
+            </a:solidFill>
+            <a:tailEnd type="triangle"/>
+          </a:ln>
+        </p:spPr>
+        <p:style>
+          <a:lnRef idx="2">
+            <a:schemeClr val="accent5"/>
+          </a:lnRef>
+          <a:fillRef idx="0">
+            <a:schemeClr val="accent5"/>
+          </a:fillRef>
+          <a:effectRef idx="1">
+            <a:schemeClr val="accent5"/>
+          </a:effectRef>
+          <a:fontRef idx="minor">
+            <a:schemeClr val="tx1"/>
+          </a:fontRef>
+        </p:style>
+      </p:cxnSp>
+      <p:sp>
+        <p:nvSpPr>
+          <p:cNvPr id="38" name="TextBox 37"/>
+          <p:cNvSpPr txBox="1"/>
+          <p:nvPr/>
+        </p:nvSpPr>
+        <p:spPr>
+          <a:xfrm>
+            <a:off x="9812460" y="2060473"/>
+            <a:ext cx="1715807" cy="276999"/>
+          </a:xfrm>
+          <a:prstGeom prst="rect">
+            <a:avLst/>
+          </a:prstGeom>
+          <a:noFill/>
+        </p:spPr>
+        <p:txBody>
+          <a:bodyPr wrap="square" rtlCol="0">
+            <a:spAutoFit/>
+          </a:bodyPr>
+          <a:lstStyle/>
+          <a:p>
+            <a:r>
+              <a:rPr lang="en-US" sz="1200" dirty="0">
+                <a:solidFill>
+                  <a:schemeClr val="bg1">
+                    <a:lumMod val="50000"/>
+                  </a:schemeClr>
+                </a:solidFill>
+              </a:rPr>
+              <a:t>2. Record Traffic</a:t>
+            </a:r>
+          </a:p>
+        </p:txBody>
+      </p:sp>
+    </p:spTree>
+  </p:cSld>
+  <p:clrMapOvr>
+    <a:masterClrMapping/>
+  </p:clrMapOvr>
+</p:sld>
+</file>
+
 <file path=ppt/slides/slide2.xml><?xml version="1.0" encoding="utf-8"?>
 <p:sld xmlns:a="http://schemas.openxmlformats.org/drawingml/2006/main" xmlns:r="http://schemas.openxmlformats.org/officeDocument/2006/relationships" xmlns:p="http://schemas.openxmlformats.org/presentationml/2006/main">
   <p:cSld>

--- a/jekyll-www.mock-server.com/images/MockServerScenarios.pptx
+++ b/jekyll-www.mock-server.com/images/MockServerScenarios.pptx
@@ -12973,216 +12973,775 @@
         <p:nvPr/>
       </p:nvGrpSpPr>
       <p:grpSpPr/>
-      <p:cxnSp>
-        <p:nvCxnSpPr>
-          <p:cNvPr id="17" name="Straight Arrow Connector 16"/>
-          <p:cNvCxnSpPr/>
+      <p:grpSp>
+        <p:nvGrpSpPr>
+          <p:cNvPr id="36" name="Group 35"/>
+          <p:cNvGrpSpPr/>
           <p:nvPr/>
-        </p:nvCxnSpPr>
-        <p:spPr>
-          <a:xfrm flipV="1">
-            <a:off x="6606727" y="3566175"/>
-            <a:ext cx="1983406" cy="4192"/>
+        </p:nvGrpSpPr>
+        <p:grpSpPr>
+          <a:xfrm>
+            <a:off x="7484922" y="4873880"/>
+            <a:ext cx="6313768" cy="1858790"/>
+            <a:chOff x="2149801" y="4442817"/>
+            <a:chExt cx="6313768" cy="1858790"/>
           </a:xfrm>
-          <a:prstGeom prst="straightConnector1">
-            <a:avLst/>
-          </a:prstGeom>
-          <a:ln>
-            <a:tailEnd type="arrow"/>
-          </a:ln>
-        </p:spPr>
-        <p:style>
-          <a:lnRef idx="2">
-            <a:schemeClr val="accent1"/>
-          </a:lnRef>
-          <a:fillRef idx="0">
-            <a:schemeClr val="accent1"/>
-          </a:fillRef>
-          <a:effectRef idx="1">
-            <a:schemeClr val="accent1"/>
-          </a:effectRef>
-          <a:fontRef idx="minor">
-            <a:schemeClr val="tx1"/>
-          </a:fontRef>
-        </p:style>
-      </p:cxnSp>
+        </p:grpSpPr>
+        <p:grpSp>
+          <p:nvGrpSpPr>
+            <p:cNvPr id="2" name="Group 1"/>
+            <p:cNvGrpSpPr/>
+            <p:nvPr/>
+          </p:nvGrpSpPr>
+          <p:grpSpPr>
+            <a:xfrm>
+              <a:off x="2149801" y="4442817"/>
+              <a:ext cx="6313768" cy="1654400"/>
+              <a:chOff x="2149801" y="4442817"/>
+              <a:chExt cx="6313768" cy="1654400"/>
+            </a:xfrm>
+          </p:grpSpPr>
+          <p:grpSp>
+            <p:nvGrpSpPr>
+              <p:cNvPr id="3" name="Group 2"/>
+              <p:cNvGrpSpPr/>
+              <p:nvPr/>
+            </p:nvGrpSpPr>
+            <p:grpSpPr>
+              <a:xfrm>
+                <a:off x="2149801" y="4442817"/>
+                <a:ext cx="6313768" cy="1589277"/>
+                <a:chOff x="2149801" y="4125318"/>
+                <a:chExt cx="6313768" cy="1589277"/>
+              </a:xfrm>
+            </p:grpSpPr>
+            <p:sp>
+              <p:nvSpPr>
+                <p:cNvPr id="5" name="Rectangle 4"/>
+                <p:cNvSpPr/>
+                <p:nvPr/>
+              </p:nvSpPr>
+              <p:spPr>
+                <a:xfrm>
+                  <a:off x="2149801" y="4566945"/>
+                  <a:ext cx="940561" cy="707837"/>
+                </a:xfrm>
+                <a:prstGeom prst="rect">
+                  <a:avLst/>
+                </a:prstGeom>
+                <a:solidFill>
+                  <a:schemeClr val="bg1"/>
+                </a:solidFill>
+                <a:ln w="19050" cmpd="sng">
+                  <a:solidFill>
+                    <a:schemeClr val="tx1"/>
+                  </a:solidFill>
+                </a:ln>
+              </p:spPr>
+              <p:style>
+                <a:lnRef idx="1">
+                  <a:schemeClr val="accent1"/>
+                </a:lnRef>
+                <a:fillRef idx="3">
+                  <a:schemeClr val="accent1"/>
+                </a:fillRef>
+                <a:effectRef idx="2">
+                  <a:schemeClr val="accent1"/>
+                </a:effectRef>
+                <a:fontRef idx="minor">
+                  <a:schemeClr val="lt1"/>
+                </a:fontRef>
+              </p:style>
+              <p:txBody>
+                <a:bodyPr rtlCol="0" anchor="ctr"/>
+                <a:lstStyle/>
+                <a:p>
+                  <a:pPr algn="ctr"/>
+                  <a:r>
+                    <a:rPr lang="en-US" sz="1000" dirty="0">
+                      <a:solidFill>
+                        <a:schemeClr val="tx1"/>
+                      </a:solidFill>
+                      <a:latin typeface="Helvetica"/>
+                      <a:cs typeface="Helvetica"/>
+                    </a:rPr>
+                    <a:t>Test</a:t>
+                  </a:r>
+                </a:p>
+              </p:txBody>
+            </p:sp>
+            <p:sp>
+              <p:nvSpPr>
+                <p:cNvPr id="6" name="Rectangle 5"/>
+                <p:cNvSpPr/>
+                <p:nvPr/>
+              </p:nvSpPr>
+              <p:spPr>
+                <a:xfrm>
+                  <a:off x="3940870" y="4566945"/>
+                  <a:ext cx="940561" cy="707837"/>
+                </a:xfrm>
+                <a:prstGeom prst="rect">
+                  <a:avLst/>
+                </a:prstGeom>
+                <a:solidFill>
+                  <a:schemeClr val="bg1"/>
+                </a:solidFill>
+                <a:ln w="19050" cmpd="sng">
+                  <a:solidFill>
+                    <a:schemeClr val="tx1"/>
+                  </a:solidFill>
+                </a:ln>
+              </p:spPr>
+              <p:style>
+                <a:lnRef idx="1">
+                  <a:schemeClr val="accent1"/>
+                </a:lnRef>
+                <a:fillRef idx="3">
+                  <a:schemeClr val="accent1"/>
+                </a:fillRef>
+                <a:effectRef idx="2">
+                  <a:schemeClr val="accent1"/>
+                </a:effectRef>
+                <a:fontRef idx="minor">
+                  <a:schemeClr val="lt1"/>
+                </a:fontRef>
+              </p:style>
+              <p:txBody>
+                <a:bodyPr rtlCol="0" anchor="ctr"/>
+                <a:lstStyle/>
+                <a:p>
+                  <a:pPr algn="ctr"/>
+                  <a:r>
+                    <a:rPr lang="en-US" sz="1000" dirty="0">
+                      <a:solidFill>
+                        <a:schemeClr val="tx1"/>
+                      </a:solidFill>
+                      <a:latin typeface="Helvetica"/>
+                      <a:cs typeface="Helvetica"/>
+                    </a:rPr>
+                    <a:t>System </a:t>
+                  </a:r>
+                </a:p>
+                <a:p>
+                  <a:pPr algn="ctr"/>
+                  <a:r>
+                    <a:rPr lang="en-US" sz="1000" dirty="0">
+                      <a:solidFill>
+                        <a:schemeClr val="tx1"/>
+                      </a:solidFill>
+                      <a:latin typeface="Helvetica"/>
+                      <a:cs typeface="Helvetica"/>
+                    </a:rPr>
+                    <a:t>Under</a:t>
+                  </a:r>
+                </a:p>
+                <a:p>
+                  <a:pPr algn="ctr"/>
+                  <a:r>
+                    <a:rPr lang="en-US" sz="1000" dirty="0">
+                      <a:solidFill>
+                        <a:schemeClr val="tx1"/>
+                      </a:solidFill>
+                      <a:latin typeface="Helvetica"/>
+                      <a:cs typeface="Helvetica"/>
+                    </a:rPr>
+                    <a:t>Test</a:t>
+                  </a:r>
+                </a:p>
+              </p:txBody>
+            </p:sp>
+            <p:sp>
+              <p:nvSpPr>
+                <p:cNvPr id="7" name="Rectangle 6"/>
+                <p:cNvSpPr/>
+                <p:nvPr/>
+              </p:nvSpPr>
+              <p:spPr>
+                <a:xfrm>
+                  <a:off x="5731939" y="4127132"/>
+                  <a:ext cx="940561" cy="1587463"/>
+                </a:xfrm>
+                <a:prstGeom prst="rect">
+                  <a:avLst/>
+                </a:prstGeom>
+                <a:solidFill>
+                  <a:schemeClr val="bg1"/>
+                </a:solidFill>
+                <a:ln w="19050" cmpd="sng">
+                  <a:solidFill>
+                    <a:schemeClr val="tx1"/>
+                  </a:solidFill>
+                </a:ln>
+              </p:spPr>
+              <p:style>
+                <a:lnRef idx="1">
+                  <a:schemeClr val="accent1"/>
+                </a:lnRef>
+                <a:fillRef idx="3">
+                  <a:schemeClr val="accent1"/>
+                </a:fillRef>
+                <a:effectRef idx="2">
+                  <a:schemeClr val="accent1"/>
+                </a:effectRef>
+                <a:fontRef idx="minor">
+                  <a:schemeClr val="lt1"/>
+                </a:fontRef>
+              </p:style>
+              <p:txBody>
+                <a:bodyPr rtlCol="0" anchor="ctr"/>
+                <a:lstStyle/>
+                <a:p>
+                  <a:pPr algn="ctr"/>
+                  <a:r>
+                    <a:rPr lang="en-US" sz="1000" dirty="0">
+                      <a:solidFill>
+                        <a:schemeClr val="tx1"/>
+                      </a:solidFill>
+                      <a:latin typeface="Helvetica"/>
+                      <a:cs typeface="Helvetica"/>
+                    </a:rPr>
+                    <a:t>Mock </a:t>
+                  </a:r>
+                </a:p>
+                <a:p>
+                  <a:pPr algn="ctr"/>
+                  <a:r>
+                    <a:rPr lang="en-US" sz="1000" dirty="0">
+                      <a:solidFill>
+                        <a:schemeClr val="tx1"/>
+                      </a:solidFill>
+                      <a:latin typeface="Helvetica"/>
+                      <a:cs typeface="Helvetica"/>
+                    </a:rPr>
+                    <a:t>Server</a:t>
+                  </a:r>
+                </a:p>
+              </p:txBody>
+            </p:sp>
+            <p:grpSp>
+              <p:nvGrpSpPr>
+                <p:cNvPr id="8" name="Group 7"/>
+                <p:cNvGrpSpPr/>
+                <p:nvPr/>
+              </p:nvGrpSpPr>
+              <p:grpSpPr>
+                <a:xfrm>
+                  <a:off x="5022083" y="4343024"/>
+                  <a:ext cx="569204" cy="1155678"/>
+                  <a:chOff x="5118828" y="2246141"/>
+                  <a:chExt cx="569204" cy="1155678"/>
+                </a:xfrm>
+              </p:grpSpPr>
+              <p:cxnSp>
+                <p:nvCxnSpPr>
+                  <p:cNvPr id="16" name="Straight Arrow Connector 15"/>
+                  <p:cNvCxnSpPr/>
+                  <p:nvPr/>
+                </p:nvCxnSpPr>
+                <p:spPr>
+                  <a:xfrm flipV="1">
+                    <a:off x="5118828" y="2246141"/>
+                    <a:ext cx="569204" cy="336489"/>
+                  </a:xfrm>
+                  <a:prstGeom prst="straightConnector1">
+                    <a:avLst/>
+                  </a:prstGeom>
+                  <a:ln>
+                    <a:tailEnd type="arrow"/>
+                  </a:ln>
+                </p:spPr>
+                <p:style>
+                  <a:lnRef idx="2">
+                    <a:schemeClr val="accent1"/>
+                  </a:lnRef>
+                  <a:fillRef idx="0">
+                    <a:schemeClr val="accent1"/>
+                  </a:fillRef>
+                  <a:effectRef idx="1">
+                    <a:schemeClr val="accent1"/>
+                  </a:effectRef>
+                  <a:fontRef idx="minor">
+                    <a:schemeClr val="tx1"/>
+                  </a:fontRef>
+                </p:style>
+              </p:cxnSp>
+              <p:cxnSp>
+                <p:nvCxnSpPr>
+                  <p:cNvPr id="17" name="Straight Arrow Connector 16"/>
+                  <p:cNvCxnSpPr/>
+                  <p:nvPr/>
+                </p:nvCxnSpPr>
+                <p:spPr>
+                  <a:xfrm>
+                    <a:off x="5118828" y="2811313"/>
+                    <a:ext cx="569204" cy="0"/>
+                  </a:xfrm>
+                  <a:prstGeom prst="straightConnector1">
+                    <a:avLst/>
+                  </a:prstGeom>
+                  <a:ln>
+                    <a:tailEnd type="arrow"/>
+                  </a:ln>
+                </p:spPr>
+                <p:style>
+                  <a:lnRef idx="2">
+                    <a:schemeClr val="accent1"/>
+                  </a:lnRef>
+                  <a:fillRef idx="0">
+                    <a:schemeClr val="accent1"/>
+                  </a:fillRef>
+                  <a:effectRef idx="1">
+                    <a:schemeClr val="accent1"/>
+                  </a:effectRef>
+                  <a:fontRef idx="minor">
+                    <a:schemeClr val="tx1"/>
+                  </a:fontRef>
+                </p:style>
+              </p:cxnSp>
+              <p:cxnSp>
+                <p:nvCxnSpPr>
+                  <p:cNvPr id="18" name="Straight Arrow Connector 17"/>
+                  <p:cNvCxnSpPr/>
+                  <p:nvPr/>
+                </p:nvCxnSpPr>
+                <p:spPr>
+                  <a:xfrm>
+                    <a:off x="5118828" y="3065330"/>
+                    <a:ext cx="569204" cy="336489"/>
+                  </a:xfrm>
+                  <a:prstGeom prst="straightConnector1">
+                    <a:avLst/>
+                  </a:prstGeom>
+                  <a:ln>
+                    <a:tailEnd type="arrow"/>
+                  </a:ln>
+                </p:spPr>
+                <p:style>
+                  <a:lnRef idx="2">
+                    <a:schemeClr val="accent1"/>
+                  </a:lnRef>
+                  <a:fillRef idx="0">
+                    <a:schemeClr val="accent1"/>
+                  </a:fillRef>
+                  <a:effectRef idx="1">
+                    <a:schemeClr val="accent1"/>
+                  </a:effectRef>
+                  <a:fontRef idx="minor">
+                    <a:schemeClr val="tx1"/>
+                  </a:fontRef>
+                </p:style>
+              </p:cxnSp>
+            </p:grpSp>
+            <p:cxnSp>
+              <p:nvCxnSpPr>
+                <p:cNvPr id="9" name="Straight Arrow Connector 8"/>
+                <p:cNvCxnSpPr/>
+                <p:nvPr/>
+              </p:nvCxnSpPr>
+              <p:spPr>
+                <a:xfrm>
+                  <a:off x="3231014" y="4920863"/>
+                  <a:ext cx="569204" cy="0"/>
+                </a:xfrm>
+                <a:prstGeom prst="straightConnector1">
+                  <a:avLst/>
+                </a:prstGeom>
+                <a:ln>
+                  <a:tailEnd type="arrow"/>
+                </a:ln>
+              </p:spPr>
+              <p:style>
+                <a:lnRef idx="2">
+                  <a:schemeClr val="accent1"/>
+                </a:lnRef>
+                <a:fillRef idx="0">
+                  <a:schemeClr val="accent1"/>
+                </a:fillRef>
+                <a:effectRef idx="1">
+                  <a:schemeClr val="accent1"/>
+                </a:effectRef>
+                <a:fontRef idx="minor">
+                  <a:schemeClr val="tx1"/>
+                </a:fontRef>
+              </p:style>
+            </p:cxnSp>
+            <p:sp>
+              <p:nvSpPr>
+                <p:cNvPr id="10" name="Rectangle 9"/>
+                <p:cNvSpPr/>
+                <p:nvPr/>
+              </p:nvSpPr>
+              <p:spPr>
+                <a:xfrm>
+                  <a:off x="7523008" y="4726981"/>
+                  <a:ext cx="940561" cy="384137"/>
+                </a:xfrm>
+                <a:prstGeom prst="rect">
+                  <a:avLst/>
+                </a:prstGeom>
+                <a:solidFill>
+                  <a:schemeClr val="bg1"/>
+                </a:solidFill>
+                <a:ln w="19050" cmpd="sng">
+                  <a:solidFill>
+                    <a:schemeClr val="tx1"/>
+                  </a:solidFill>
+                </a:ln>
+              </p:spPr>
+              <p:style>
+                <a:lnRef idx="1">
+                  <a:schemeClr val="accent1"/>
+                </a:lnRef>
+                <a:fillRef idx="3">
+                  <a:schemeClr val="accent1"/>
+                </a:fillRef>
+                <a:effectRef idx="2">
+                  <a:schemeClr val="accent1"/>
+                </a:effectRef>
+                <a:fontRef idx="minor">
+                  <a:schemeClr val="lt1"/>
+                </a:fontRef>
+              </p:style>
+              <p:txBody>
+                <a:bodyPr rtlCol="0" anchor="ctr"/>
+                <a:lstStyle/>
+                <a:p>
+                  <a:pPr algn="ctr"/>
+                  <a:r>
+                    <a:rPr lang="en-US" sz="1000" dirty="0">
+                      <a:solidFill>
+                        <a:schemeClr val="tx1"/>
+                      </a:solidFill>
+                      <a:latin typeface="Helvetica"/>
+                      <a:cs typeface="Helvetica"/>
+                    </a:rPr>
+                    <a:t>Service 2</a:t>
+                  </a:r>
+                </a:p>
+              </p:txBody>
+            </p:sp>
+            <p:sp>
+              <p:nvSpPr>
+                <p:cNvPr id="11" name="Rectangle 10"/>
+                <p:cNvSpPr/>
+                <p:nvPr/>
+              </p:nvSpPr>
+              <p:spPr>
+                <a:xfrm>
+                  <a:off x="7523008" y="4125318"/>
+                  <a:ext cx="940561" cy="384137"/>
+                </a:xfrm>
+                <a:prstGeom prst="rect">
+                  <a:avLst/>
+                </a:prstGeom>
+                <a:solidFill>
+                  <a:schemeClr val="bg1"/>
+                </a:solidFill>
+                <a:ln w="19050" cmpd="sng">
+                  <a:solidFill>
+                    <a:schemeClr val="tx1"/>
+                  </a:solidFill>
+                </a:ln>
+              </p:spPr>
+              <p:style>
+                <a:lnRef idx="1">
+                  <a:schemeClr val="accent1"/>
+                </a:lnRef>
+                <a:fillRef idx="3">
+                  <a:schemeClr val="accent1"/>
+                </a:fillRef>
+                <a:effectRef idx="2">
+                  <a:schemeClr val="accent1"/>
+                </a:effectRef>
+                <a:fontRef idx="minor">
+                  <a:schemeClr val="lt1"/>
+                </a:fontRef>
+              </p:style>
+              <p:txBody>
+                <a:bodyPr rtlCol="0" anchor="ctr"/>
+                <a:lstStyle/>
+                <a:p>
+                  <a:pPr algn="ctr"/>
+                  <a:r>
+                    <a:rPr lang="en-US" sz="1000" dirty="0">
+                      <a:solidFill>
+                        <a:schemeClr val="tx1"/>
+                      </a:solidFill>
+                      <a:latin typeface="Helvetica"/>
+                      <a:cs typeface="Helvetica"/>
+                    </a:rPr>
+                    <a:t>Service 1</a:t>
+                  </a:r>
+                </a:p>
+              </p:txBody>
+            </p:sp>
+            <p:sp>
+              <p:nvSpPr>
+                <p:cNvPr id="12" name="Rectangle 11"/>
+                <p:cNvSpPr/>
+                <p:nvPr/>
+              </p:nvSpPr>
+              <p:spPr>
+                <a:xfrm>
+                  <a:off x="7523008" y="5328644"/>
+                  <a:ext cx="940561" cy="384137"/>
+                </a:xfrm>
+                <a:prstGeom prst="rect">
+                  <a:avLst/>
+                </a:prstGeom>
+                <a:solidFill>
+                  <a:schemeClr val="bg1"/>
+                </a:solidFill>
+                <a:ln w="19050" cmpd="sng">
+                  <a:solidFill>
+                    <a:schemeClr val="tx1"/>
+                  </a:solidFill>
+                </a:ln>
+              </p:spPr>
+              <p:style>
+                <a:lnRef idx="1">
+                  <a:schemeClr val="accent1"/>
+                </a:lnRef>
+                <a:fillRef idx="3">
+                  <a:schemeClr val="accent1"/>
+                </a:fillRef>
+                <a:effectRef idx="2">
+                  <a:schemeClr val="accent1"/>
+                </a:effectRef>
+                <a:fontRef idx="minor">
+                  <a:schemeClr val="lt1"/>
+                </a:fontRef>
+              </p:style>
+              <p:txBody>
+                <a:bodyPr lIns="91436" tIns="45718" rIns="91436" bIns="45718" rtlCol="0" anchor="ctr" anchorCtr="0"/>
+                <a:lstStyle/>
+                <a:p>
+                  <a:pPr algn="ctr"/>
+                  <a:r>
+                    <a:rPr lang="en-US" sz="900" dirty="0">
+                      <a:solidFill>
+                        <a:schemeClr val="tx1"/>
+                      </a:solidFill>
+                      <a:latin typeface="Helvetica"/>
+                      <a:cs typeface="Helvetica"/>
+                    </a:rPr>
+                    <a:t>Service 2</a:t>
+                  </a:r>
+                </a:p>
+              </p:txBody>
+            </p:sp>
+            <p:cxnSp>
+              <p:nvCxnSpPr>
+                <p:cNvPr id="13" name="Straight Arrow Connector 12"/>
+                <p:cNvCxnSpPr/>
+                <p:nvPr/>
+              </p:nvCxnSpPr>
+              <p:spPr>
+                <a:xfrm>
+                  <a:off x="6813152" y="4906382"/>
+                  <a:ext cx="569204" cy="0"/>
+                </a:xfrm>
+                <a:prstGeom prst="straightConnector1">
+                  <a:avLst/>
+                </a:prstGeom>
+                <a:ln>
+                  <a:tailEnd type="arrow"/>
+                </a:ln>
+              </p:spPr>
+              <p:style>
+                <a:lnRef idx="2">
+                  <a:schemeClr val="accent1"/>
+                </a:lnRef>
+                <a:fillRef idx="0">
+                  <a:schemeClr val="accent1"/>
+                </a:fillRef>
+                <a:effectRef idx="1">
+                  <a:schemeClr val="accent1"/>
+                </a:effectRef>
+                <a:fontRef idx="minor">
+                  <a:schemeClr val="tx1"/>
+                </a:fontRef>
+              </p:style>
+            </p:cxnSp>
+            <p:cxnSp>
+              <p:nvCxnSpPr>
+                <p:cNvPr id="14" name="Straight Arrow Connector 13"/>
+                <p:cNvCxnSpPr/>
+                <p:nvPr/>
+              </p:nvCxnSpPr>
+              <p:spPr>
+                <a:xfrm>
+                  <a:off x="6813152" y="4343024"/>
+                  <a:ext cx="569204" cy="0"/>
+                </a:xfrm>
+                <a:prstGeom prst="straightConnector1">
+                  <a:avLst/>
+                </a:prstGeom>
+                <a:ln>
+                  <a:tailEnd type="arrow"/>
+                </a:ln>
+              </p:spPr>
+              <p:style>
+                <a:lnRef idx="2">
+                  <a:schemeClr val="accent1"/>
+                </a:lnRef>
+                <a:fillRef idx="0">
+                  <a:schemeClr val="accent1"/>
+                </a:fillRef>
+                <a:effectRef idx="1">
+                  <a:schemeClr val="accent1"/>
+                </a:effectRef>
+                <a:fontRef idx="minor">
+                  <a:schemeClr val="tx1"/>
+                </a:fontRef>
+              </p:style>
+            </p:cxnSp>
+            <p:cxnSp>
+              <p:nvCxnSpPr>
+                <p:cNvPr id="15" name="Straight Arrow Connector 14"/>
+                <p:cNvCxnSpPr/>
+                <p:nvPr/>
+              </p:nvCxnSpPr>
+              <p:spPr>
+                <a:xfrm>
+                  <a:off x="6813152" y="5496888"/>
+                  <a:ext cx="569204" cy="0"/>
+                </a:xfrm>
+                <a:prstGeom prst="straightConnector1">
+                  <a:avLst/>
+                </a:prstGeom>
+                <a:ln>
+                  <a:tailEnd type="arrow"/>
+                </a:ln>
+              </p:spPr>
+              <p:style>
+                <a:lnRef idx="2">
+                  <a:schemeClr val="accent1"/>
+                </a:lnRef>
+                <a:fillRef idx="0">
+                  <a:schemeClr val="accent1"/>
+                </a:fillRef>
+                <a:effectRef idx="1">
+                  <a:schemeClr val="accent1"/>
+                </a:effectRef>
+                <a:fontRef idx="minor">
+                  <a:schemeClr val="tx1"/>
+                </a:fontRef>
+              </p:style>
+            </p:cxnSp>
+          </p:grpSp>
+          <p:cxnSp>
+            <p:nvCxnSpPr>
+              <p:cNvPr id="4" name="Straight Arrow Connector 74"/>
+              <p:cNvCxnSpPr/>
+              <p:nvPr/>
+            </p:nvCxnSpPr>
+            <p:spPr>
+              <a:xfrm rot="16200000" flipH="1">
+                <a:off x="4191245" y="4086242"/>
+                <a:ext cx="439813" cy="3582138"/>
+              </a:xfrm>
+              <a:prstGeom prst="bentConnector3">
+                <a:avLst>
+                  <a:gd name="adj1" fmla="val 151977"/>
+                </a:avLst>
+              </a:prstGeom>
+              <a:ln>
+                <a:tailEnd type="arrow"/>
+              </a:ln>
+            </p:spPr>
+            <p:style>
+              <a:lnRef idx="2">
+                <a:schemeClr val="accent1"/>
+              </a:lnRef>
+              <a:fillRef idx="0">
+                <a:schemeClr val="accent1"/>
+              </a:fillRef>
+              <a:effectRef idx="1">
+                <a:schemeClr val="accent1"/>
+              </a:effectRef>
+              <a:fontRef idx="minor">
+                <a:schemeClr val="tx1"/>
+              </a:fontRef>
+            </p:style>
+          </p:cxnSp>
+        </p:grpSp>
+        <p:sp>
+          <p:nvSpPr>
+            <p:cNvPr id="19" name="TextBox 18"/>
+            <p:cNvSpPr txBox="1"/>
+            <p:nvPr/>
+          </p:nvSpPr>
+          <p:spPr>
+            <a:xfrm>
+              <a:off x="2652648" y="6024608"/>
+              <a:ext cx="2118137" cy="276999"/>
+            </a:xfrm>
+            <a:prstGeom prst="rect">
+              <a:avLst/>
+            </a:prstGeom>
+            <a:noFill/>
+          </p:spPr>
+          <p:txBody>
+            <a:bodyPr wrap="square" rtlCol="0">
+              <a:spAutoFit/>
+            </a:bodyPr>
+            <a:lstStyle/>
+            <a:p>
+              <a:r>
+                <a:rPr lang="en-US" sz="1200" dirty="0"/>
+                <a:t>2. Verify Responses</a:t>
+              </a:r>
+            </a:p>
+          </p:txBody>
+        </p:sp>
+        <p:sp>
+          <p:nvSpPr>
+            <p:cNvPr id="20" name="TextBox 19"/>
+            <p:cNvSpPr txBox="1"/>
+            <p:nvPr/>
+          </p:nvSpPr>
+          <p:spPr>
+            <a:xfrm>
+              <a:off x="3146981" y="4935727"/>
+              <a:ext cx="2118137" cy="276999"/>
+            </a:xfrm>
+            <a:prstGeom prst="rect">
+              <a:avLst/>
+            </a:prstGeom>
+            <a:noFill/>
+          </p:spPr>
+          <p:txBody>
+            <a:bodyPr wrap="square" rtlCol="0">
+              <a:spAutoFit/>
+            </a:bodyPr>
+            <a:lstStyle/>
+            <a:p>
+              <a:r>
+                <a:rPr lang="en-US" sz="1200" dirty="0"/>
+                <a:t>1. Test</a:t>
+              </a:r>
+            </a:p>
+          </p:txBody>
+        </p:sp>
+      </p:grpSp>
       <p:sp>
         <p:nvSpPr>
-          <p:cNvPr id="18" name="TextBox 17"/>
-          <p:cNvSpPr txBox="1"/>
-          <p:nvPr/>
-        </p:nvSpPr>
-        <p:spPr>
-          <a:xfrm>
-            <a:off x="6521663" y="3291482"/>
-            <a:ext cx="2759008" cy="276999"/>
-          </a:xfrm>
-          <a:prstGeom prst="rect">
-            <a:avLst/>
-          </a:prstGeom>
-          <a:noFill/>
-        </p:spPr>
-        <p:txBody>
-          <a:bodyPr wrap="square" rtlCol="0">
-            <a:spAutoFit/>
-          </a:bodyPr>
-          <a:lstStyle/>
-          <a:p>
-            <a:r>
-              <a:rPr lang="en-US" sz="1200" dirty="0"/>
-              <a:t>3. Send Verification</a:t>
-            </a:r>
-          </a:p>
-        </p:txBody>
-      </p:sp>
-      <p:sp>
-        <p:nvSpPr>
-          <p:cNvPr id="67" name="TextBox 66"/>
-          <p:cNvSpPr txBox="1"/>
-          <p:nvPr/>
-        </p:nvSpPr>
-        <p:spPr>
-          <a:xfrm>
-            <a:off x="6521663" y="4121697"/>
-            <a:ext cx="1553402" cy="276999"/>
-          </a:xfrm>
-          <a:prstGeom prst="rect">
-            <a:avLst/>
-          </a:prstGeom>
-          <a:noFill/>
-        </p:spPr>
-        <p:txBody>
-          <a:bodyPr wrap="square" rtlCol="0">
-            <a:spAutoFit/>
-          </a:bodyPr>
-          <a:lstStyle/>
-          <a:p>
-            <a:r>
-              <a:rPr lang="en-US" sz="1200" dirty="0"/>
-              <a:t>5. Return Result</a:t>
-            </a:r>
-            <a:r>
-              <a:rPr lang="en-US" sz="1200"/>
-              <a:t/>
-            </a:r>
-            <a:r>
-              <a:rPr lang="en-US" sz="1200" dirty="0"/>
-              <a:t/>
-            </a:r>
-          </a:p>
-        </p:txBody>
-      </p:sp>
-      <p:cxnSp>
-        <p:nvCxnSpPr>
-          <p:cNvPr id="88" name="Straight Arrow Connector 87"/>
-          <p:cNvCxnSpPr/>
-          <p:nvPr/>
-        </p:nvCxnSpPr>
-        <p:spPr>
-          <a:xfrm rot="5400000">
-            <a:off x="7662580" y="2914941"/>
-            <a:ext cx="422144" cy="2533849"/>
-          </a:xfrm>
-          <a:prstGeom prst="bentConnector2">
-            <a:avLst/>
-          </a:prstGeom>
-          <a:ln>
-            <a:tailEnd type="triangle"/>
-          </a:ln>
-        </p:spPr>
-        <p:style>
-          <a:lnRef idx="2">
-            <a:schemeClr val="accent1"/>
-          </a:lnRef>
-          <a:fillRef idx="0">
-            <a:schemeClr val="accent1"/>
-          </a:fillRef>
-          <a:effectRef idx="1">
-            <a:schemeClr val="accent1"/>
-          </a:effectRef>
-          <a:fontRef idx="minor">
-            <a:schemeClr val="tx1"/>
-          </a:fontRef>
-        </p:style>
-      </p:cxnSp>
-      <p:sp>
-        <p:nvSpPr>
-          <p:cNvPr id="2" name="Can 1"/>
+          <p:cNvPr id="55" name="Rectangle 54">
+            <a:extLst>
+              <a:ext uri="{FF2B5EF4-FFF2-40B4-BE49-F238E27FC236}">
+                <a16:creationId xmlns:a16="http://schemas.microsoft.com/office/drawing/2014/main" id="{DD2E7644-B3C6-BF4B-9FF1-A2F2E84FA400}"/>
+              </a:ext>
+            </a:extLst>
+          </p:cNvPr>
           <p:cNvSpPr/>
           <p:nvPr/>
         </p:nvSpPr>
         <p:spPr>
           <a:xfrm>
-            <a:off x="11173710" y="3122264"/>
-            <a:ext cx="988828" cy="868444"/>
-          </a:xfrm>
-          <a:prstGeom prst="can">
-            <a:avLst/>
-          </a:prstGeom>
-          <a:solidFill>
-            <a:schemeClr val="bg1"/>
-          </a:solidFill>
-          <a:ln w="19050" cmpd="sng">
-            <a:solidFill>
-              <a:schemeClr val="tx1"/>
-            </a:solidFill>
-          </a:ln>
-        </p:spPr>
-        <p:style>
-          <a:lnRef idx="1">
-            <a:schemeClr val="accent1"/>
-          </a:lnRef>
-          <a:fillRef idx="3">
-            <a:schemeClr val="accent1"/>
-          </a:fillRef>
-          <a:effectRef idx="2">
-            <a:schemeClr val="accent1"/>
-          </a:effectRef>
-          <a:fontRef idx="minor">
-            <a:schemeClr val="lt1"/>
-          </a:fontRef>
-        </p:style>
-        <p:txBody>
-          <a:bodyPr lIns="91436" tIns="45718" rIns="91436" bIns="45718" rtlCol="0" anchor="ctr" anchorCtr="0"/>
-          <a:lstStyle/>
-          <a:p>
-            <a:pPr algn="ctr"/>
-            <a:r>
-              <a:rPr lang="en-US" sz="900" dirty="0">
-                <a:solidFill>
-                  <a:schemeClr val="tx1"/>
-                </a:solidFill>
-                <a:latin typeface="Helvetica"/>
-                <a:cs typeface="Helvetica"/>
-              </a:rPr>
-              <a:t>Recorded</a:t>
-            </a:r>
-          </a:p>
-          <a:p>
-            <a:pPr algn="ctr"/>
-            <a:r>
-              <a:rPr lang="en-US" sz="900" dirty="0">
-                <a:solidFill>
-                  <a:schemeClr val="tx1"/>
-                </a:solidFill>
-                <a:latin typeface="Helvetica"/>
-                <a:cs typeface="Helvetica"/>
-              </a:rPr>
-              <a:t>Responses</a:t>
-            </a:r>
-          </a:p>
-        </p:txBody>
-      </p:sp>
-      <p:sp>
-        <p:nvSpPr>
-          <p:cNvPr id="21" name="Rectangle 20"/>
-          <p:cNvSpPr/>
-          <p:nvPr/>
-        </p:nvSpPr>
-        <p:spPr>
-          <a:xfrm>
-            <a:off x="8664564" y="3242893"/>
-            <a:ext cx="940561" cy="664100"/>
+            <a:off x="9234424" y="2885538"/>
+            <a:ext cx="940561" cy="707837"/>
           </a:xfrm>
           <a:prstGeom prst="rect">
             <a:avLst/>
@@ -13211,53 +13770,283 @@
           </a:fontRef>
         </p:style>
         <p:txBody>
-          <a:bodyPr lIns="91436" tIns="45718" rIns="91436" bIns="45718" rtlCol="0" anchor="ctr" anchorCtr="0"/>
+          <a:bodyPr rtlCol="0" anchor="ctr"/>
           <a:lstStyle/>
           <a:p>
             <a:pPr algn="ctr"/>
             <a:r>
-              <a:rPr lang="en-US" sz="900" dirty="0">
+              <a:rPr lang="en-US" sz="1000" dirty="0">
                 <a:solidFill>
                   <a:schemeClr val="tx1"/>
                 </a:solidFill>
                 <a:latin typeface="Helvetica"/>
                 <a:cs typeface="Helvetica"/>
               </a:rPr>
-              <a:t>Request</a:t>
+              <a:t>System </a:t>
             </a:r>
           </a:p>
           <a:p>
             <a:pPr algn="ctr"/>
             <a:r>
-              <a:rPr lang="en-US" sz="900" dirty="0">
+              <a:rPr lang="en-US" sz="1000" dirty="0">
                 <a:solidFill>
                   <a:schemeClr val="tx1"/>
                 </a:solidFill>
                 <a:latin typeface="Helvetica"/>
                 <a:cs typeface="Helvetica"/>
               </a:rPr>
-              <a:t>Matcher</a:t>
+              <a:t>Under</a:t>
+            </a:r>
+          </a:p>
+          <a:p>
+            <a:pPr algn="ctr"/>
+            <a:r>
+              <a:rPr lang="en-US" sz="1000" dirty="0">
+                <a:solidFill>
+                  <a:schemeClr val="tx1"/>
+                </a:solidFill>
+                <a:latin typeface="Helvetica"/>
+                <a:cs typeface="Helvetica"/>
+              </a:rPr>
+              <a:t>Test</a:t>
             </a:r>
           </a:p>
         </p:txBody>
       </p:sp>
+      <p:sp>
+        <p:nvSpPr>
+          <p:cNvPr id="56" name="Rectangle 55">
+            <a:extLst>
+              <a:ext uri="{FF2B5EF4-FFF2-40B4-BE49-F238E27FC236}">
+                <a16:creationId xmlns:a16="http://schemas.microsoft.com/office/drawing/2014/main" id="{53CF2EA3-46E7-B74B-9A2D-B668A4A2903A}"/>
+              </a:ext>
+            </a:extLst>
+          </p:cNvPr>
+          <p:cNvSpPr/>
+          <p:nvPr/>
+        </p:nvSpPr>
+        <p:spPr>
+          <a:xfrm>
+            <a:off x="11025493" y="2445725"/>
+            <a:ext cx="940561" cy="1587463"/>
+          </a:xfrm>
+          <a:prstGeom prst="rect">
+            <a:avLst/>
+          </a:prstGeom>
+          <a:solidFill>
+            <a:schemeClr val="bg1"/>
+          </a:solidFill>
+          <a:ln w="19050" cmpd="sng">
+            <a:solidFill>
+              <a:schemeClr val="tx1"/>
+            </a:solidFill>
+          </a:ln>
+        </p:spPr>
+        <p:style>
+          <a:lnRef idx="1">
+            <a:schemeClr val="accent1"/>
+          </a:lnRef>
+          <a:fillRef idx="3">
+            <a:schemeClr val="accent1"/>
+          </a:fillRef>
+          <a:effectRef idx="2">
+            <a:schemeClr val="accent1"/>
+          </a:effectRef>
+          <a:fontRef idx="minor">
+            <a:schemeClr val="lt1"/>
+          </a:fontRef>
+        </p:style>
+        <p:txBody>
+          <a:bodyPr rtlCol="0" anchor="ctr"/>
+          <a:lstStyle/>
+          <a:p>
+            <a:pPr algn="ctr"/>
+            <a:r>
+              <a:rPr lang="en-US" sz="1000" dirty="0">
+                <a:solidFill>
+                  <a:schemeClr val="tx1"/>
+                </a:solidFill>
+                <a:latin typeface="Helvetica"/>
+                <a:cs typeface="Helvetica"/>
+              </a:rPr>
+              <a:t>Mock </a:t>
+            </a:r>
+          </a:p>
+          <a:p>
+            <a:pPr algn="ctr"/>
+            <a:r>
+              <a:rPr lang="en-US" sz="1000" dirty="0">
+                <a:solidFill>
+                  <a:schemeClr val="tx1"/>
+                </a:solidFill>
+                <a:latin typeface="Helvetica"/>
+                <a:cs typeface="Helvetica"/>
+              </a:rPr>
+              <a:t>Server</a:t>
+            </a:r>
+          </a:p>
+        </p:txBody>
+      </p:sp>
+      <p:grpSp>
+        <p:nvGrpSpPr>
+          <p:cNvPr id="57" name="Group 56">
+            <a:extLst>
+              <a:ext uri="{FF2B5EF4-FFF2-40B4-BE49-F238E27FC236}">
+                <a16:creationId xmlns:a16="http://schemas.microsoft.com/office/drawing/2014/main" id="{9B9AE29D-DD48-484A-923D-163573B8FEC1}"/>
+              </a:ext>
+            </a:extLst>
+          </p:cNvPr>
+          <p:cNvGrpSpPr/>
+          <p:nvPr/>
+        </p:nvGrpSpPr>
+        <p:grpSpPr>
+          <a:xfrm>
+            <a:off x="10315637" y="2661617"/>
+            <a:ext cx="569204" cy="1155678"/>
+            <a:chOff x="5118828" y="2246141"/>
+            <a:chExt cx="569204" cy="1155678"/>
+          </a:xfrm>
+        </p:grpSpPr>
+        <p:cxnSp>
+          <p:nvCxnSpPr>
+            <p:cNvPr id="65" name="Straight Arrow Connector 64">
+              <a:extLst>
+                <a:ext uri="{FF2B5EF4-FFF2-40B4-BE49-F238E27FC236}">
+                  <a16:creationId xmlns:a16="http://schemas.microsoft.com/office/drawing/2014/main" id="{35F3CAF3-1D91-0D47-A442-AE608355BD23}"/>
+                </a:ext>
+              </a:extLst>
+            </p:cNvPr>
+            <p:cNvCxnSpPr/>
+            <p:nvPr/>
+          </p:nvCxnSpPr>
+          <p:spPr>
+            <a:xfrm flipV="1">
+              <a:off x="5118828" y="2246141"/>
+              <a:ext cx="569204" cy="336489"/>
+            </a:xfrm>
+            <a:prstGeom prst="straightConnector1">
+              <a:avLst/>
+            </a:prstGeom>
+            <a:ln>
+              <a:tailEnd type="arrow"/>
+            </a:ln>
+          </p:spPr>
+          <p:style>
+            <a:lnRef idx="2">
+              <a:schemeClr val="accent1"/>
+            </a:lnRef>
+            <a:fillRef idx="0">
+              <a:schemeClr val="accent1"/>
+            </a:fillRef>
+            <a:effectRef idx="1">
+              <a:schemeClr val="accent1"/>
+            </a:effectRef>
+            <a:fontRef idx="minor">
+              <a:schemeClr val="tx1"/>
+            </a:fontRef>
+          </p:style>
+        </p:cxnSp>
+        <p:cxnSp>
+          <p:nvCxnSpPr>
+            <p:cNvPr id="66" name="Straight Arrow Connector 65">
+              <a:extLst>
+                <a:ext uri="{FF2B5EF4-FFF2-40B4-BE49-F238E27FC236}">
+                  <a16:creationId xmlns:a16="http://schemas.microsoft.com/office/drawing/2014/main" id="{4BABA5FF-856C-5449-9563-39AEE53A3E2F}"/>
+                </a:ext>
+              </a:extLst>
+            </p:cNvPr>
+            <p:cNvCxnSpPr/>
+            <p:nvPr/>
+          </p:nvCxnSpPr>
+          <p:spPr>
+            <a:xfrm>
+              <a:off x="5118828" y="2811313"/>
+              <a:ext cx="569204" cy="0"/>
+            </a:xfrm>
+            <a:prstGeom prst="straightConnector1">
+              <a:avLst/>
+            </a:prstGeom>
+            <a:ln>
+              <a:tailEnd type="arrow"/>
+            </a:ln>
+          </p:spPr>
+          <p:style>
+            <a:lnRef idx="2">
+              <a:schemeClr val="accent1"/>
+            </a:lnRef>
+            <a:fillRef idx="0">
+              <a:schemeClr val="accent1"/>
+            </a:fillRef>
+            <a:effectRef idx="1">
+              <a:schemeClr val="accent1"/>
+            </a:effectRef>
+            <a:fontRef idx="minor">
+              <a:schemeClr val="tx1"/>
+            </a:fontRef>
+          </p:style>
+        </p:cxnSp>
+        <p:cxnSp>
+          <p:nvCxnSpPr>
+            <p:cNvPr id="67" name="Straight Arrow Connector 66">
+              <a:extLst>
+                <a:ext uri="{FF2B5EF4-FFF2-40B4-BE49-F238E27FC236}">
+                  <a16:creationId xmlns:a16="http://schemas.microsoft.com/office/drawing/2014/main" id="{4531EFF7-F80B-F245-A1F2-AFA2AEC56943}"/>
+                </a:ext>
+              </a:extLst>
+            </p:cNvPr>
+            <p:cNvCxnSpPr/>
+            <p:nvPr/>
+          </p:nvCxnSpPr>
+          <p:spPr>
+            <a:xfrm>
+              <a:off x="5118828" y="3065330"/>
+              <a:ext cx="569204" cy="336489"/>
+            </a:xfrm>
+            <a:prstGeom prst="straightConnector1">
+              <a:avLst/>
+            </a:prstGeom>
+            <a:ln>
+              <a:tailEnd type="arrow"/>
+            </a:ln>
+          </p:spPr>
+          <p:style>
+            <a:lnRef idx="2">
+              <a:schemeClr val="accent1"/>
+            </a:lnRef>
+            <a:fillRef idx="0">
+              <a:schemeClr val="accent1"/>
+            </a:fillRef>
+            <a:effectRef idx="1">
+              <a:schemeClr val="accent1"/>
+            </a:effectRef>
+            <a:fontRef idx="minor">
+              <a:schemeClr val="tx1"/>
+            </a:fontRef>
+          </p:style>
+        </p:cxnSp>
+      </p:grpSp>
       <p:cxnSp>
         <p:nvCxnSpPr>
-          <p:cNvPr id="7" name="Straight Arrow Connector 6"/>
+          <p:cNvPr id="58" name="Straight Arrow Connector 57">
+            <a:extLst>
+              <a:ext uri="{FF2B5EF4-FFF2-40B4-BE49-F238E27FC236}">
+                <a16:creationId xmlns:a16="http://schemas.microsoft.com/office/drawing/2014/main" id="{5F569CDC-1C9F-F34B-91EC-39873A951689}"/>
+              </a:ext>
+            </a:extLst>
+          </p:cNvPr>
           <p:cNvCxnSpPr/>
           <p:nvPr/>
         </p:nvCxnSpPr>
         <p:spPr>
           <a:xfrm>
-            <a:off x="9714192" y="3567122"/>
-            <a:ext cx="1355774" cy="7823"/>
+            <a:off x="8524568" y="3239456"/>
+            <a:ext cx="569204" cy="0"/>
           </a:xfrm>
           <a:prstGeom prst="straightConnector1">
             <a:avLst/>
           </a:prstGeom>
           <a:ln>
-            <a:headEnd type="triangle"/>
-            <a:tailEnd type="triangle"/>
+            <a:tailEnd type="arrow"/>
           </a:ln>
         </p:spPr>
         <p:style>
@@ -13277,45 +14066,22 @@
       </p:cxnSp>
       <p:sp>
         <p:nvSpPr>
-          <p:cNvPr id="28" name="TextBox 27"/>
-          <p:cNvSpPr txBox="1"/>
-          <p:nvPr/>
-        </p:nvSpPr>
-        <p:spPr>
-          <a:xfrm>
-            <a:off x="9639761" y="3274794"/>
-            <a:ext cx="1553402" cy="276999"/>
-          </a:xfrm>
-          <a:prstGeom prst="rect">
-            <a:avLst/>
-          </a:prstGeom>
-          <a:noFill/>
-        </p:spPr>
-        <p:txBody>
-          <a:bodyPr wrap="square" rtlCol="0">
-            <a:spAutoFit/>
-          </a:bodyPr>
-          <a:lstStyle/>
-          <a:p>
-            <a:r>
-              <a:rPr lang="en-US" sz="1200" dirty="0"/>
-              <a:t>4. Match Response(s)</a:t>
-            </a:r>
-          </a:p>
-        </p:txBody>
-      </p:sp>
-      <p:sp>
-        <p:nvSpPr>
-          <p:cNvPr id="31" name="Rounded Rectangle 30"/>
+          <p:cNvPr id="59" name="Rectangle 58">
+            <a:extLst>
+              <a:ext uri="{FF2B5EF4-FFF2-40B4-BE49-F238E27FC236}">
+                <a16:creationId xmlns:a16="http://schemas.microsoft.com/office/drawing/2014/main" id="{87EB875B-BD02-0448-AE8E-162214BF6E4F}"/>
+              </a:ext>
+            </a:extLst>
+          </p:cNvPr>
           <p:cNvSpPr/>
           <p:nvPr/>
         </p:nvSpPr>
         <p:spPr>
           <a:xfrm>
-            <a:off x="8457229" y="1823774"/>
-            <a:ext cx="1355231" cy="1012102"/>
+            <a:off x="12816562" y="3045574"/>
+            <a:ext cx="940561" cy="384137"/>
           </a:xfrm>
-          <a:prstGeom prst="roundRect">
+          <a:prstGeom prst="rect">
             <a:avLst/>
           </a:prstGeom>
           <a:solidFill>
@@ -13323,13 +14089,8 @@
           </a:solidFill>
           <a:ln w="19050" cmpd="sng">
             <a:solidFill>
-              <a:schemeClr val="tx1">
-                <a:lumMod val="50000"/>
-                <a:lumOff val="50000"/>
-                <a:alpha val="70000"/>
-              </a:schemeClr>
+              <a:schemeClr val="tx1"/>
             </a:solidFill>
-            <a:prstDash val="dash"/>
           </a:ln>
         </p:spPr>
         <p:style>
@@ -13347,75 +14108,166 @@
           </a:fontRef>
         </p:style>
         <p:txBody>
-          <a:bodyPr rtlCol="0" anchor="ctr" anchorCtr="0"/>
+          <a:bodyPr rtlCol="0" anchor="ctr"/>
           <a:lstStyle/>
           <a:p>
             <a:pPr algn="ctr"/>
             <a:r>
-              <a:rPr lang="en-US" sz="1200" dirty="0">
+              <a:rPr lang="en-US" sz="1000" dirty="0">
                 <a:solidFill>
-                  <a:schemeClr val="bg1">
-                    <a:lumMod val="50000"/>
-                  </a:schemeClr>
+                  <a:schemeClr val="tx1"/>
                 </a:solidFill>
                 <a:latin typeface="Helvetica"/>
                 <a:cs typeface="Helvetica"/>
               </a:rPr>
-              <a:t>Expectation</a:t>
-            </a:r>
-          </a:p>
+              <a:t>Service 2</a:t>
+            </a:r>
+          </a:p>
+        </p:txBody>
+      </p:sp>
+      <p:sp>
+        <p:nvSpPr>
+          <p:cNvPr id="60" name="Rectangle 59">
+            <a:extLst>
+              <a:ext uri="{FF2B5EF4-FFF2-40B4-BE49-F238E27FC236}">
+                <a16:creationId xmlns:a16="http://schemas.microsoft.com/office/drawing/2014/main" id="{616C38C2-FA9F-5D42-846D-F54F8D90AEF8}"/>
+              </a:ext>
+            </a:extLst>
+          </p:cNvPr>
+          <p:cNvSpPr/>
+          <p:nvPr/>
+        </p:nvSpPr>
+        <p:spPr>
+          <a:xfrm>
+            <a:off x="12816562" y="2443911"/>
+            <a:ext cx="940561" cy="384137"/>
+          </a:xfrm>
+          <a:prstGeom prst="rect">
+            <a:avLst/>
+          </a:prstGeom>
+          <a:solidFill>
+            <a:schemeClr val="bg1"/>
+          </a:solidFill>
+          <a:ln w="19050" cmpd="sng">
+            <a:solidFill>
+              <a:schemeClr val="tx1"/>
+            </a:solidFill>
+          </a:ln>
+        </p:spPr>
+        <p:style>
+          <a:lnRef idx="1">
+            <a:schemeClr val="accent1"/>
+          </a:lnRef>
+          <a:fillRef idx="3">
+            <a:schemeClr val="accent1"/>
+          </a:fillRef>
+          <a:effectRef idx="2">
+            <a:schemeClr val="accent1"/>
+          </a:effectRef>
+          <a:fontRef idx="minor">
+            <a:schemeClr val="lt1"/>
+          </a:fontRef>
+        </p:style>
+        <p:txBody>
+          <a:bodyPr rtlCol="0" anchor="ctr"/>
+          <a:lstStyle/>
           <a:p>
             <a:pPr algn="ctr"/>
             <a:r>
-              <a:rPr lang="en-US" sz="1200" dirty="0">
+              <a:rPr lang="en-US" sz="1000" dirty="0">
                 <a:solidFill>
-                  <a:schemeClr val="bg1">
-                    <a:lumMod val="50000"/>
-                  </a:schemeClr>
+                  <a:schemeClr val="tx1"/>
                 </a:solidFill>
                 <a:latin typeface="Helvetica"/>
                 <a:cs typeface="Helvetica"/>
               </a:rPr>
-              <a:t>or</a:t>
-            </a:r>
-          </a:p>
+              <a:t>Service 1</a:t>
+            </a:r>
+          </a:p>
+        </p:txBody>
+      </p:sp>
+      <p:sp>
+        <p:nvSpPr>
+          <p:cNvPr id="61" name="Rectangle 60">
+            <a:extLst>
+              <a:ext uri="{FF2B5EF4-FFF2-40B4-BE49-F238E27FC236}">
+                <a16:creationId xmlns:a16="http://schemas.microsoft.com/office/drawing/2014/main" id="{9FDC9A00-4ABC-B74F-A190-DEBBD242287C}"/>
+              </a:ext>
+            </a:extLst>
+          </p:cNvPr>
+          <p:cNvSpPr/>
+          <p:nvPr/>
+        </p:nvSpPr>
+        <p:spPr>
+          <a:xfrm>
+            <a:off x="12816562" y="3647237"/>
+            <a:ext cx="940561" cy="384137"/>
+          </a:xfrm>
+          <a:prstGeom prst="rect">
+            <a:avLst/>
+          </a:prstGeom>
+          <a:solidFill>
+            <a:schemeClr val="bg1"/>
+          </a:solidFill>
+          <a:ln w="19050" cmpd="sng">
+            <a:solidFill>
+              <a:schemeClr val="tx1"/>
+            </a:solidFill>
+          </a:ln>
+        </p:spPr>
+        <p:style>
+          <a:lnRef idx="1">
+            <a:schemeClr val="accent1"/>
+          </a:lnRef>
+          <a:fillRef idx="3">
+            <a:schemeClr val="accent1"/>
+          </a:fillRef>
+          <a:effectRef idx="2">
+            <a:schemeClr val="accent1"/>
+          </a:effectRef>
+          <a:fontRef idx="minor">
+            <a:schemeClr val="lt1"/>
+          </a:fontRef>
+        </p:style>
+        <p:txBody>
+          <a:bodyPr lIns="91436" tIns="45718" rIns="91436" bIns="45718" rtlCol="0" anchor="ctr" anchorCtr="0"/>
+          <a:lstStyle/>
           <a:p>
             <a:pPr algn="ctr"/>
             <a:r>
-              <a:rPr lang="en-US" sz="1200" dirty="0">
+              <a:rPr lang="en-US" sz="900" dirty="0">
                 <a:solidFill>
-                  <a:schemeClr val="bg1">
-                    <a:lumMod val="50000"/>
-                  </a:schemeClr>
+                  <a:schemeClr val="tx1"/>
                 </a:solidFill>
                 <a:latin typeface="Helvetica"/>
                 <a:cs typeface="Helvetica"/>
               </a:rPr>
-              <a:t>Proxy</a:t>
+              <a:t>Service 2</a:t>
             </a:r>
           </a:p>
         </p:txBody>
       </p:sp>
       <p:cxnSp>
         <p:nvCxnSpPr>
-          <p:cNvPr id="32" name="Straight Arrow Connector 31"/>
+          <p:cNvPr id="62" name="Straight Arrow Connector 61">
+            <a:extLst>
+              <a:ext uri="{FF2B5EF4-FFF2-40B4-BE49-F238E27FC236}">
+                <a16:creationId xmlns:a16="http://schemas.microsoft.com/office/drawing/2014/main" id="{704A4D3A-28CE-5549-8651-A32106E73596}"/>
+              </a:ext>
+            </a:extLst>
+          </p:cNvPr>
           <p:cNvCxnSpPr/>
           <p:nvPr/>
         </p:nvCxnSpPr>
         <p:spPr>
-          <a:xfrm flipV="1">
-            <a:off x="6606729" y="2326837"/>
-            <a:ext cx="1764891" cy="1888"/>
+          <a:xfrm>
+            <a:off x="12106706" y="3224975"/>
+            <a:ext cx="569204" cy="0"/>
           </a:xfrm>
           <a:prstGeom prst="straightConnector1">
             <a:avLst/>
           </a:prstGeom>
           <a:ln>
-            <a:solidFill>
-              <a:schemeClr val="accent1">
-                <a:alpha val="70000"/>
-              </a:schemeClr>
-            </a:solidFill>
             <a:tailEnd type="arrow"/>
           </a:ln>
         </p:spPr>
@@ -13434,62 +14286,28 @@
           </a:fontRef>
         </p:style>
       </p:cxnSp>
-      <p:sp>
-        <p:nvSpPr>
-          <p:cNvPr id="33" name="TextBox 32"/>
-          <p:cNvSpPr txBox="1"/>
-          <p:nvPr/>
-        </p:nvSpPr>
-        <p:spPr>
-          <a:xfrm>
-            <a:off x="6521665" y="2049840"/>
-            <a:ext cx="1715807" cy="276999"/>
-          </a:xfrm>
-          <a:prstGeom prst="rect">
-            <a:avLst/>
-          </a:prstGeom>
-          <a:noFill/>
-        </p:spPr>
-        <p:txBody>
-          <a:bodyPr wrap="square" rtlCol="0">
-            <a:spAutoFit/>
-          </a:bodyPr>
-          <a:lstStyle/>
-          <a:p>
-            <a:r>
-              <a:rPr lang="en-US" sz="1200" dirty="0">
-                <a:solidFill>
-                  <a:schemeClr val="bg1">
-                    <a:lumMod val="50000"/>
-                  </a:schemeClr>
-                </a:solidFill>
-              </a:rPr>
-              <a:t>1. Receive Request</a:t>
-            </a:r>
-          </a:p>
-        </p:txBody>
-      </p:sp>
       <p:cxnSp>
         <p:nvCxnSpPr>
-          <p:cNvPr id="22" name="Elbow Connector 21"/>
+          <p:cNvPr id="63" name="Straight Arrow Connector 62">
+            <a:extLst>
+              <a:ext uri="{FF2B5EF4-FFF2-40B4-BE49-F238E27FC236}">
+                <a16:creationId xmlns:a16="http://schemas.microsoft.com/office/drawing/2014/main" id="{AE9604DF-B73E-5142-BC3F-B02FFA1F0288}"/>
+              </a:ext>
+            </a:extLst>
+          </p:cNvPr>
           <p:cNvCxnSpPr/>
           <p:nvPr/>
         </p:nvCxnSpPr>
         <p:spPr>
           <a:xfrm>
-            <a:off x="9876256" y="2329825"/>
-            <a:ext cx="1783814" cy="741880"/>
+            <a:off x="12106706" y="2661617"/>
+            <a:ext cx="569204" cy="0"/>
           </a:xfrm>
-          <a:prstGeom prst="bentConnector2">
+          <a:prstGeom prst="straightConnector1">
             <a:avLst/>
           </a:prstGeom>
           <a:ln>
-            <a:solidFill>
-              <a:schemeClr val="accent1">
-                <a:alpha val="70000"/>
-              </a:schemeClr>
-            </a:solidFill>
-            <a:tailEnd type="triangle"/>
+            <a:tailEnd type="arrow"/>
           </a:ln>
         </p:spPr>
         <p:style>
@@ -13507,41 +14325,45 @@
           </a:fontRef>
         </p:style>
       </p:cxnSp>
-      <p:sp>
-        <p:nvSpPr>
-          <p:cNvPr id="38" name="TextBox 37"/>
-          <p:cNvSpPr txBox="1"/>
+      <p:cxnSp>
+        <p:nvCxnSpPr>
+          <p:cNvPr id="64" name="Straight Arrow Connector 63">
+            <a:extLst>
+              <a:ext uri="{FF2B5EF4-FFF2-40B4-BE49-F238E27FC236}">
+                <a16:creationId xmlns:a16="http://schemas.microsoft.com/office/drawing/2014/main" id="{E19B290F-8856-3D41-AB55-6661F5A55D1B}"/>
+              </a:ext>
+            </a:extLst>
+          </p:cNvPr>
+          <p:cNvCxnSpPr/>
           <p:nvPr/>
-        </p:nvSpPr>
+        </p:nvCxnSpPr>
         <p:spPr>
           <a:xfrm>
-            <a:off x="9812460" y="2060473"/>
-            <a:ext cx="1715807" cy="276999"/>
+            <a:off x="12106706" y="3815481"/>
+            <a:ext cx="569204" cy="0"/>
           </a:xfrm>
-          <a:prstGeom prst="rect">
+          <a:prstGeom prst="straightConnector1">
             <a:avLst/>
           </a:prstGeom>
-          <a:noFill/>
+          <a:ln>
+            <a:tailEnd type="arrow"/>
+          </a:ln>
         </p:spPr>
-        <p:txBody>
-          <a:bodyPr wrap="square" rtlCol="0">
-            <a:spAutoFit/>
-          </a:bodyPr>
-          <a:lstStyle/>
-          <a:p>
-            <a:r>
-              <a:rPr lang="en-US" sz="1200" dirty="0">
-                <a:solidFill>
-                  <a:schemeClr val="bg1">
-                    <a:lumMod val="50000"/>
-                  </a:schemeClr>
-                </a:solidFill>
-              </a:rPr>
-              <a:t>2. Record Response</a:t>
-            </a:r>
-          </a:p>
-        </p:txBody>
-      </p:sp>
+        <p:style>
+          <a:lnRef idx="2">
+            <a:schemeClr val="accent1"/>
+          </a:lnRef>
+          <a:fillRef idx="0">
+            <a:schemeClr val="accent1"/>
+          </a:fillRef>
+          <a:effectRef idx="1">
+            <a:schemeClr val="accent1"/>
+          </a:effectRef>
+          <a:fontRef idx="minor">
+            <a:schemeClr val="tx1"/>
+          </a:fontRef>
+        </p:style>
+      </p:cxnSp>
     </p:spTree>
   </p:cSld>
   <p:clrMapOvr>
